--- a/projects/ai-training-course/procurement/lesson-1-metallurgy.pptx
+++ b/projects/ai-training-course/procurement/lesson-1-metallurgy.pptx
@@ -22,6 +22,8 @@
     <p:sldId id="270" r:id="rId21"/>
     <p:sldId id="271" r:id="rId22"/>
     <p:sldId id="272" r:id="rId23"/>
+    <p:sldId id="273" r:id="rId24"/>
+    <p:sldId id="274" r:id="rId25"/>
   </p:sldIdLst>
   <p:sldSz cx="12191695" cy="6858000" type="screen4x3"/>
   <p:notesSz cx="6858000" cy="9144000"/>
@@ -3244,7 +3246,7 @@
               </a:defRPr>
             </a:pPr>
             <a:r>
-              <a:t>Демо 1: Составление ТЗ на ферросплавы</a:t>
+              <a:t>Eval — ИИ проверяет сам себя</a:t>
             </a:r>
           </a:p>
         </p:txBody>
@@ -3286,7 +3288,19 @@
               </a:defRPr>
             </a:pPr>
             <a:r>
-              <a:t>Сценарий: нужно купить ферромарганец для электросталеплавильного цеха.</a:t>
+              <a:t>Зачем нужен Eval? AI может:</a:t>
+            </a:r>
+            <a:br/>
+            <a:r>
+              <a:t>• Что-то упустить (забыть про гарантию)</a:t>
+            </a:r>
+            <a:br/>
+            <a:r>
+              <a:t>• Обобщить важную деталь</a:t>
+            </a:r>
+            <a:br/>
+            <a:r>
+              <a:t>• Домыслить то, чего нет в контексте</a:t>
             </a:r>
           </a:p>
           <a:p>
@@ -3305,15 +3319,7 @@
               </a:defRPr>
             </a:pPr>
             <a:r>
-              <a:t>Шаг 1 — базовый запрос:</a:t>
-            </a:r>
-            <a:br/>
-            <a:r>
-              <a:t>'Составь ТЗ на закупку ферромарганца.'</a:t>
-            </a:r>
-            <a:br/>
-            <a:r>
-              <a:t>→ Результат: общий шаблон. Без параметров, без специфики.</a:t>
+              <a:t>Eval = просим ИИ найти свои ошибки.</a:t>
             </a:r>
           </a:p>
           <a:p>
@@ -3332,15 +3338,23 @@
               </a:defRPr>
             </a:pPr>
             <a:r>
-              <a:t>Шаг 2 — улучшенный запрос (РКЗФО):</a:t>
+              <a:t>4 вопроса для Eval:</a:t>
             </a:r>
             <a:br/>
             <a:r>
-              <a:t>Роль: металлург-технолог. Контекст: электросталеплавильный цех, плавка стали 12Х18Н10Т, объём 500 т/мес. Задача: ТЗ на ферромарганец ФМн78 по ГОСТ 4755. Формат: общие требования + химический состав (таблица: элемент, мин%, макс%) + гранулометрия + требования к упаковке и маркировке + условия поставки + форма заявки. Ограничения: поставка в вагонах, мин партия 60 т.</a:t>
+              <a:t>1. 'Оцени ответ 1–10' — выявляет галлюцинации, выдуманные факты</a:t>
             </a:r>
             <a:br/>
             <a:r>
-              <a:t>→ Результат: готовое ТЗ с таблицами.</a:t>
+              <a:t>2. 'Что ты не учёл?' — находит слепые пятна, упущенные параметры</a:t>
+            </a:r>
+            <a:br/>
+            <a:r>
+              <a:t>3. 'Найди 3 слабых места' — ловит неточности, допущения</a:t>
+            </a:r>
+            <a:br/>
+            <a:r>
+              <a:t>4. 'Предложи другой подход' — даёт альтернативные решения</a:t>
             </a:r>
           </a:p>
           <a:p>
@@ -3359,15 +3373,30 @@
               </a:defRPr>
             </a:pPr>
             <a:r>
-              <a:t>Шаг 3 — Eval:</a:t>
+              <a:t>Пример Eval для ТЗ:</a:t>
             </a:r>
             <a:br/>
             <a:r>
-              <a:t>'Оцени ТЗ 1–10. Что не учтено для зимней поставки? Какие требования к влажности?'</a:t>
-            </a:r>
-            <a:br/>
-            <a:r>
-              <a:t>→ Результат: улучшенное ТЗ с недостающими пунктами.</a:t>
+              <a:t>'Оцени ТЗ 1–10. Какие технические параметры упустил? Что должен указать заказчик? Какие риски для поставщика не учтены?'</a:t>
+            </a:r>
+          </a:p>
+          <a:p>
+            <a:pPr>
+              <a:lnSpc>
+                <a:spcPct val="130000"/>
+              </a:lnSpc>
+              <a:spcBef>
+                <a:spcPts val="800"/>
+              </a:spcBef>
+              <a:defRPr sz="1700">
+                <a:solidFill>
+                  <a:srgbClr val="FFFFFF"/>
+                </a:solidFill>
+                <a:latin typeface="Arial"/>
+              </a:defRPr>
+            </a:pPr>
+            <a:r>
+              <a:t>Результат: ИИ находит слабые места и предлагает улучшения.</a:t>
             </a:r>
           </a:p>
         </p:txBody>
@@ -3429,21 +3458,102 @@
               </a:defRPr>
             </a:pPr>
             <a:r>
-              <a:t>Демо 2: Конкурентный лист из 3 КП</a:t>
-            </a:r>
-          </a:p>
-        </p:txBody>
-      </p:sp>
-      <p:sp>
-        <p:nvSpPr>
-          <p:cNvPr id="3" name="TextBox 2"/>
+              <a:t>4 фишки GENAi для закупщика</a:t>
+            </a:r>
+          </a:p>
+        </p:txBody>
+      </p:sp>
+      <p:sp>
+        <p:nvSpPr>
+          <p:cNvPr id="3" name="Rectangle 2"/>
+          <p:cNvSpPr/>
+          <p:nvPr/>
+        </p:nvSpPr>
+        <p:spPr>
+          <a:xfrm>
+            <a:off x="457200" y="1188720"/>
+            <a:ext cx="5303520" cy="2331720"/>
+          </a:xfrm>
+          <a:prstGeom prst="rect">
+            <a:avLst/>
+          </a:prstGeom>
+          <a:solidFill>
+            <a:srgbClr val="14141E"/>
+          </a:solidFill>
+          <a:ln>
+            <a:solidFill>
+              <a:srgbClr val="28283C"/>
+            </a:solidFill>
+          </a:ln>
+        </p:spPr>
+        <p:style>
+          <a:lnRef idx="1">
+            <a:schemeClr val="accent1"/>
+          </a:lnRef>
+          <a:fillRef idx="3">
+            <a:schemeClr val="accent1"/>
+          </a:fillRef>
+          <a:effectRef idx="2">
+            <a:schemeClr val="accent1"/>
+          </a:effectRef>
+          <a:fontRef idx="minor">
+            <a:schemeClr val="lt1"/>
+          </a:fontRef>
+        </p:style>
+        <p:txBody>
+          <a:bodyPr rtlCol="0" anchor="ctr"/>
+          <a:lstStyle/>
+          <a:p>
+            <a:pPr algn="ctr"/>
+          </a:p>
+        </p:txBody>
+      </p:sp>
+      <p:sp>
+        <p:nvSpPr>
+          <p:cNvPr id="4" name="TextBox 3"/>
           <p:cNvSpPr txBox="1"/>
           <p:nvPr/>
         </p:nvSpPr>
         <p:spPr>
           <a:xfrm>
-            <a:off x="457200" y="1097280"/>
-            <a:ext cx="11247120" cy="5303520"/>
+            <a:off x="548640" y="1325880"/>
+            <a:ext cx="5120640" cy="457200"/>
+          </a:xfrm>
+          <a:prstGeom prst="rect">
+            <a:avLst/>
+          </a:prstGeom>
+          <a:noFill/>
+        </p:spPr>
+        <p:txBody>
+          <a:bodyPr wrap="none">
+            <a:spAutoFit/>
+          </a:bodyPr>
+          <a:lstStyle/>
+          <a:p>
+            <a:pPr>
+              <a:defRPr sz="1800" b="1">
+                <a:solidFill>
+                  <a:srgbClr val="FFFFFF"/>
+                </a:solidFill>
+                <a:latin typeface="Arial"/>
+              </a:defRPr>
+            </a:pPr>
+            <a:r>
+              <a:t>Фишка 1: Загрузка файлов 📎</a:t>
+            </a:r>
+          </a:p>
+        </p:txBody>
+      </p:sp>
+      <p:sp>
+        <p:nvSpPr>
+          <p:cNvPr id="5" name="TextBox 4"/>
+          <p:cNvSpPr txBox="1"/>
+          <p:nvPr/>
+        </p:nvSpPr>
+        <p:spPr>
+          <a:xfrm>
+            <a:off x="548640" y="1828800"/>
+            <a:ext cx="5120640" cy="1600200"/>
           </a:xfrm>
           <a:prstGeom prst="rect">
             <a:avLst/>
@@ -3458,12 +3568,90 @@
           <a:p>
             <a:pPr>
               <a:lnSpc>
-                <a:spcPct val="130000"/>
+                <a:spcPct val="120000"/>
               </a:lnSpc>
-              <a:spcBef>
-                <a:spcPts val="800"/>
-              </a:spcBef>
-              <a:defRPr sz="1700">
+              <a:defRPr sz="1400">
+                <a:solidFill>
+                  <a:srgbClr val="CBD5E1"/>
+                </a:solidFill>
+                <a:latin typeface="Arial"/>
+              </a:defRPr>
+            </a:pPr>
+            <a:r>
+              <a:t>Загружайте старые ТЗ → ИИ повторит структуру. Загружайте КП → ИИ извлечёт цены. Загружайте договоры → ИИ найдёт риски.</a:t>
+            </a:r>
+          </a:p>
+        </p:txBody>
+      </p:sp>
+      <p:sp>
+        <p:nvSpPr>
+          <p:cNvPr id="6" name="Rectangle 5"/>
+          <p:cNvSpPr/>
+          <p:nvPr/>
+        </p:nvSpPr>
+        <p:spPr>
+          <a:xfrm>
+            <a:off x="5943600" y="1188720"/>
+            <a:ext cx="5303520" cy="2331720"/>
+          </a:xfrm>
+          <a:prstGeom prst="rect">
+            <a:avLst/>
+          </a:prstGeom>
+          <a:solidFill>
+            <a:srgbClr val="14141E"/>
+          </a:solidFill>
+          <a:ln>
+            <a:solidFill>
+              <a:srgbClr val="28283C"/>
+            </a:solidFill>
+          </a:ln>
+        </p:spPr>
+        <p:style>
+          <a:lnRef idx="1">
+            <a:schemeClr val="accent1"/>
+          </a:lnRef>
+          <a:fillRef idx="3">
+            <a:schemeClr val="accent1"/>
+          </a:fillRef>
+          <a:effectRef idx="2">
+            <a:schemeClr val="accent1"/>
+          </a:effectRef>
+          <a:fontRef idx="minor">
+            <a:schemeClr val="lt1"/>
+          </a:fontRef>
+        </p:style>
+        <p:txBody>
+          <a:bodyPr rtlCol="0" anchor="ctr"/>
+          <a:lstStyle/>
+          <a:p>
+            <a:pPr algn="ctr"/>
+          </a:p>
+        </p:txBody>
+      </p:sp>
+      <p:sp>
+        <p:nvSpPr>
+          <p:cNvPr id="7" name="TextBox 6"/>
+          <p:cNvSpPr txBox="1"/>
+          <p:nvPr/>
+        </p:nvSpPr>
+        <p:spPr>
+          <a:xfrm>
+            <a:off x="6035040" y="1325880"/>
+            <a:ext cx="5120640" cy="457200"/>
+          </a:xfrm>
+          <a:prstGeom prst="rect">
+            <a:avLst/>
+          </a:prstGeom>
+          <a:noFill/>
+        </p:spPr>
+        <p:txBody>
+          <a:bodyPr wrap="none">
+            <a:spAutoFit/>
+          </a:bodyPr>
+          <a:lstStyle/>
+          <a:p>
+            <a:pPr>
+              <a:defRPr sz="1800" b="1">
                 <a:solidFill>
                   <a:srgbClr val="FFFFFF"/>
                 </a:solidFill>
@@ -3471,18 +3659,119 @@
               </a:defRPr>
             </a:pPr>
             <a:r>
-              <a:t>Сценарий: получили 3 предложения на графитированные электроды УHP 450 мм (100 шт).</a:t>
-            </a:r>
-          </a:p>
+              <a:t>Фишка 2: System Prompt</a:t>
+            </a:r>
+          </a:p>
+        </p:txBody>
+      </p:sp>
+      <p:sp>
+        <p:nvSpPr>
+          <p:cNvPr id="8" name="TextBox 7"/>
+          <p:cNvSpPr txBox="1"/>
+          <p:nvPr/>
+        </p:nvSpPr>
+        <p:spPr>
+          <a:xfrm>
+            <a:off x="6035040" y="1828800"/>
+            <a:ext cx="5120640" cy="1600200"/>
+          </a:xfrm>
+          <a:prstGeom prst="rect">
+            <a:avLst/>
+          </a:prstGeom>
+          <a:noFill/>
+        </p:spPr>
+        <p:txBody>
+          <a:bodyPr wrap="square">
+            <a:spAutoFit/>
+          </a:bodyPr>
+          <a:lstStyle/>
           <a:p>
             <a:pPr>
               <a:lnSpc>
-                <a:spcPct val="130000"/>
+                <a:spcPct val="120000"/>
               </a:lnSpc>
-              <a:spcBef>
-                <a:spcPts val="800"/>
-              </a:spcBef>
-              <a:defRPr sz="1700">
+              <a:defRPr sz="1400">
+                <a:solidFill>
+                  <a:srgbClr val="CBD5E1"/>
+                </a:solidFill>
+                <a:latin typeface="Arial"/>
+              </a:defRPr>
+            </a:pPr>
+            <a:r>
+              <a:t>Настройка ассистента: 'Ты — ассистент закупщика. Всегда используй таблицы. Структура: анализ → риски → рекомендация.' Каждый чат работает по вашим правилам.</a:t>
+            </a:r>
+          </a:p>
+        </p:txBody>
+      </p:sp>
+      <p:sp>
+        <p:nvSpPr>
+          <p:cNvPr id="9" name="Rectangle 8"/>
+          <p:cNvSpPr/>
+          <p:nvPr/>
+        </p:nvSpPr>
+        <p:spPr>
+          <a:xfrm>
+            <a:off x="457200" y="3703320"/>
+            <a:ext cx="5303520" cy="2331720"/>
+          </a:xfrm>
+          <a:prstGeom prst="rect">
+            <a:avLst/>
+          </a:prstGeom>
+          <a:solidFill>
+            <a:srgbClr val="14141E"/>
+          </a:solidFill>
+          <a:ln>
+            <a:solidFill>
+              <a:srgbClr val="28283C"/>
+            </a:solidFill>
+          </a:ln>
+        </p:spPr>
+        <p:style>
+          <a:lnRef idx="1">
+            <a:schemeClr val="accent1"/>
+          </a:lnRef>
+          <a:fillRef idx="3">
+            <a:schemeClr val="accent1"/>
+          </a:fillRef>
+          <a:effectRef idx="2">
+            <a:schemeClr val="accent1"/>
+          </a:effectRef>
+          <a:fontRef idx="minor">
+            <a:schemeClr val="lt1"/>
+          </a:fontRef>
+        </p:style>
+        <p:txBody>
+          <a:bodyPr rtlCol="0" anchor="ctr"/>
+          <a:lstStyle/>
+          <a:p>
+            <a:pPr algn="ctr"/>
+          </a:p>
+        </p:txBody>
+      </p:sp>
+      <p:sp>
+        <p:nvSpPr>
+          <p:cNvPr id="10" name="TextBox 9"/>
+          <p:cNvSpPr txBox="1"/>
+          <p:nvPr/>
+        </p:nvSpPr>
+        <p:spPr>
+          <a:xfrm>
+            <a:off x="548640" y="3840480"/>
+            <a:ext cx="5120640" cy="457200"/>
+          </a:xfrm>
+          <a:prstGeom prst="rect">
+            <a:avLst/>
+          </a:prstGeom>
+          <a:noFill/>
+        </p:spPr>
+        <p:txBody>
+          <a:bodyPr wrap="none">
+            <a:spAutoFit/>
+          </a:bodyPr>
+          <a:lstStyle/>
+          <a:p>
+            <a:pPr>
+              <a:defRPr sz="1800" b="1">
                 <a:solidFill>
                   <a:srgbClr val="FFFFFF"/>
                 </a:solidFill>
@@ -3490,30 +3779,119 @@
               </a:defRPr>
             </a:pPr>
             <a:r>
-              <a:t>Данные:</a:t>
-            </a:r>
-            <a:br/>
-            <a:r>
-              <a:t>• Поставщик А (Китай): $4200/т, 45 дней, гарантия 6 мес, оплата 30/70, доставка CIF</a:t>
-            </a:r>
-            <a:br/>
-            <a:r>
-              <a:t>• Поставщик Б (РФ): $5100/т, 14 дней, гарантия 12 мес, оплата 50/50, доставка самовывоз</a:t>
-            </a:r>
-            <a:br/>
-            <a:r>
-              <a:t>• Поставщик В (Индия): $3900/т, 60 дней, гарантия 3 мес, оплата 100% предоплата, доставка CIF</a:t>
-            </a:r>
-          </a:p>
+              <a:t>Фишка 3: Шаблоны</a:t>
+            </a:r>
+          </a:p>
+        </p:txBody>
+      </p:sp>
+      <p:sp>
+        <p:nvSpPr>
+          <p:cNvPr id="11" name="TextBox 10"/>
+          <p:cNvSpPr txBox="1"/>
+          <p:nvPr/>
+        </p:nvSpPr>
+        <p:spPr>
+          <a:xfrm>
+            <a:off x="548640" y="4343400"/>
+            <a:ext cx="5120640" cy="1600200"/>
+          </a:xfrm>
+          <a:prstGeom prst="rect">
+            <a:avLst/>
+          </a:prstGeom>
+          <a:noFill/>
+        </p:spPr>
+        <p:txBody>
+          <a:bodyPr wrap="square">
+            <a:spAutoFit/>
+          </a:bodyPr>
+          <a:lstStyle/>
           <a:p>
             <a:pPr>
               <a:lnSpc>
-                <a:spcPct val="130000"/>
+                <a:spcPct val="120000"/>
               </a:lnSpc>
-              <a:spcBef>
-                <a:spcPts val="800"/>
-              </a:spcBef>
-              <a:defRPr sz="1700">
+              <a:defRPr sz="1400">
+                <a:solidFill>
+                  <a:srgbClr val="CBD5E1"/>
+                </a:solidFill>
+                <a:latin typeface="Arial"/>
+              </a:defRPr>
+            </a:pPr>
+            <a:r>
+              <a:t>Сохраняйте хорошие промпты как шаблоны. ТЗ_закупка → готовый промпт за 2 секунды. Экономия 5-10 минут.</a:t>
+            </a:r>
+          </a:p>
+        </p:txBody>
+      </p:sp>
+      <p:sp>
+        <p:nvSpPr>
+          <p:cNvPr id="12" name="Rectangle 11"/>
+          <p:cNvSpPr/>
+          <p:nvPr/>
+        </p:nvSpPr>
+        <p:spPr>
+          <a:xfrm>
+            <a:off x="5943600" y="3703320"/>
+            <a:ext cx="5303520" cy="2331720"/>
+          </a:xfrm>
+          <a:prstGeom prst="rect">
+            <a:avLst/>
+          </a:prstGeom>
+          <a:solidFill>
+            <a:srgbClr val="14141E"/>
+          </a:solidFill>
+          <a:ln>
+            <a:solidFill>
+              <a:srgbClr val="28283C"/>
+            </a:solidFill>
+          </a:ln>
+        </p:spPr>
+        <p:style>
+          <a:lnRef idx="1">
+            <a:schemeClr val="accent1"/>
+          </a:lnRef>
+          <a:fillRef idx="3">
+            <a:schemeClr val="accent1"/>
+          </a:fillRef>
+          <a:effectRef idx="2">
+            <a:schemeClr val="accent1"/>
+          </a:effectRef>
+          <a:fontRef idx="minor">
+            <a:schemeClr val="lt1"/>
+          </a:fontRef>
+        </p:style>
+        <p:txBody>
+          <a:bodyPr rtlCol="0" anchor="ctr"/>
+          <a:lstStyle/>
+          <a:p>
+            <a:pPr algn="ctr"/>
+          </a:p>
+        </p:txBody>
+      </p:sp>
+      <p:sp>
+        <p:nvSpPr>
+          <p:cNvPr id="13" name="TextBox 12"/>
+          <p:cNvSpPr txBox="1"/>
+          <p:nvPr/>
+        </p:nvSpPr>
+        <p:spPr>
+          <a:xfrm>
+            <a:off x="6035040" y="3840480"/>
+            <a:ext cx="5120640" cy="457200"/>
+          </a:xfrm>
+          <a:prstGeom prst="rect">
+            <a:avLst/>
+          </a:prstGeom>
+          <a:noFill/>
+        </p:spPr>
+        <p:txBody>
+          <a:bodyPr wrap="none">
+            <a:spAutoFit/>
+          </a:bodyPr>
+          <a:lstStyle/>
+          <a:p>
+            <a:pPr>
+              <a:defRPr sz="1800" b="1">
                 <a:solidFill>
                   <a:srgbClr val="FFFFFF"/>
                 </a:solidFill>
@@ -3521,49 +3899,46 @@
               </a:defRPr>
             </a:pPr>
             <a:r>
-              <a:t>Промпт:</a:t>
-            </a:r>
-            <a:br/>
-            <a:r>
-              <a:t>Роль: аналитик закупок металлургического сырья. Задача: сформировать конкурентный лист. Требования: таблица сравнения + критерии оценки (цена 35%, срок 25%, гарантия 20%, условия 20%) + рейтинг 1-5 по каждому критерию + итоговый рейтинг + рекомендация с обоснованием.</a:t>
-            </a:r>
-          </a:p>
+              <a:t>Фишка 4: Knowledge Base</a:t>
+            </a:r>
+          </a:p>
+        </p:txBody>
+      </p:sp>
+      <p:sp>
+        <p:nvSpPr>
+          <p:cNvPr id="14" name="TextBox 13"/>
+          <p:cNvSpPr txBox="1"/>
+          <p:nvPr/>
+        </p:nvSpPr>
+        <p:spPr>
+          <a:xfrm>
+            <a:off x="6035040" y="4343400"/>
+            <a:ext cx="5120640" cy="1600200"/>
+          </a:xfrm>
+          <a:prstGeom prst="rect">
+            <a:avLst/>
+          </a:prstGeom>
+          <a:noFill/>
+        </p:spPr>
+        <p:txBody>
+          <a:bodyPr wrap="square">
+            <a:spAutoFit/>
+          </a:bodyPr>
+          <a:lstStyle/>
           <a:p>
             <a:pPr>
               <a:lnSpc>
-                <a:spcPct val="130000"/>
+                <a:spcPct val="120000"/>
               </a:lnSpc>
-              <a:spcBef>
-                <a:spcPts val="800"/>
-              </a:spcBef>
-              <a:defRPr sz="1700">
-                <a:solidFill>
-                  <a:srgbClr val="FFFFFF"/>
-                </a:solidFill>
-                <a:latin typeface="Arial"/>
-              </a:defRPr>
-            </a:pPr>
-            <a:r>
-              <a:t>Результат: таблица с взвешенными оценками, итоговый рейтинг, рекомендация с цифрами.</a:t>
-            </a:r>
-          </a:p>
-          <a:p>
-            <a:pPr>
-              <a:lnSpc>
-                <a:spcPct val="130000"/>
-              </a:lnSpc>
-              <a:spcBef>
-                <a:spcPts val="800"/>
-              </a:spcBef>
-              <a:defRPr sz="1700">
-                <a:solidFill>
-                  <a:srgbClr val="FFFFFF"/>
-                </a:solidFill>
-                <a:latin typeface="Arial"/>
-              </a:defRPr>
-            </a:pPr>
-            <a:r>
-              <a:t>Eval: 'Какие риски не учтены? Что проверить у поставщиков? Какие скрытые затраты (таможня, НДС)?'</a:t>
+              <a:defRPr sz="1400">
+                <a:solidFill>
+                  <a:srgbClr val="CBD5E1"/>
+                </a:solidFill>
+                <a:latin typeface="Arial"/>
+              </a:defRPr>
+            </a:pPr>
+            <a:r>
+              <a:t>Загрузите регламенты, шаблоны ТЗ, историю закупок. ИИ будет отвечать с учётом ваших правил и примеров.</a:t>
             </a:r>
           </a:p>
         </p:txBody>
@@ -3625,7 +4000,7 @@
               </a:defRPr>
             </a:pPr>
             <a:r>
-              <a:t>Демо 3: Перевод ТКП и переписка с поставщиками</a:t>
+              <a:t>Демо 1: Составление ТЗ на ферросплавы</a:t>
             </a:r>
           </a:p>
         </p:txBody>
@@ -3667,7 +4042,7 @@
               </a:defRPr>
             </a:pPr>
             <a:r>
-              <a:t>Сценарий: получили ТКП от китайского поставщика на огнеупорные материалы. Нужно перевести и подготовить ответ.</a:t>
+              <a:t>Сценарий: нужно купить ферромарганец для электросталеплавильного цеха.</a:t>
             </a:r>
           </a:p>
           <a:p>
@@ -3686,11 +4061,15 @@
               </a:defRPr>
             </a:pPr>
             <a:r>
-              <a:t>Шаг 1 — Перевод ТКП:</a:t>
+              <a:t>Шаг 1 — базовый запрос:</a:t>
             </a:r>
             <a:br/>
             <a:r>
-              <a:t>[Загрузить PDF через скрепку]</a:t>
+              <a:t>'Составь ТЗ на закупку ферромарганца.'</a:t>
+            </a:r>
+            <a:br/>
+            <a:r>
+              <a:t>→ Результат: общий шаблон. Без параметров, без специфики.</a:t>
             </a:r>
           </a:p>
           <a:p>
@@ -3709,11 +4088,15 @@
               </a:defRPr>
             </a:pPr>
             <a:r>
-              <a:t>Промпт:</a:t>
+              <a:t>Шаг 2 — улучшенный запрос (РКЗФО):</a:t>
             </a:r>
             <a:br/>
             <a:r>
-              <a:t>'Роль: переводчик технических текстов. Задача: перевести ТКП с китайского на русский. Сохранить таблицы, цифры, технические термины. Формат: русский текст с оригинальными названиями в скобках. Ограничения: не упрощай, сохрани все технические детали.'</a:t>
+              <a:t>Роль: металлург-технолог. Контекст: электросталеплавильный цех, плавка стали 12Х18Н10Т, объём 500 т/мес. Задача: ТЗ на ферромарганец ФМн78 по ГОСТ 4755. Формат: общие требования + химический состав (таблица: элемент, мин%, макс%) + гранулометрия + требования к упаковке и маркировке + условия поставки + форма заявки. Ограничения: поставка в вагонах, мин партия 60 т.</a:t>
+            </a:r>
+            <a:br/>
+            <a:r>
+              <a:t>→ Результат: готовое ТЗ с таблицами.</a:t>
             </a:r>
           </a:p>
           <a:p>
@@ -3732,34 +4115,15 @@
               </a:defRPr>
             </a:pPr>
             <a:r>
-              <a:t>Шаг 2 — Подготовка ответа поставщику:</a:t>
+              <a:t>Шаг 3 — Eval:</a:t>
             </a:r>
             <a:br/>
             <a:r>
-              <a:t>Промпт:</a:t>
+              <a:t>'Оцени ТЗ 1–10. Что не учтено для зимней поставки? Какие требования к влажности?'</a:t>
             </a:r>
             <a:br/>
             <a:r>
-              <a:t>'Роль: менеджер по закупкам. Задача: написать ответное письмо китайскому поставщику на английском. Контекст: мы рассматриваем их ТКП, но цена выше рынка на 15%. Просим скидку или альтернативные марки. Тон: деловой, вежливый, но твёрдый. Формат: деловое письмо. Ограничения: без обещаний, укажем, что решение через 2 недели.'</a:t>
-            </a:r>
-          </a:p>
-          <a:p>
-            <a:pPr>
-              <a:lnSpc>
-                <a:spcPct val="130000"/>
-              </a:lnSpc>
-              <a:spcBef>
-                <a:spcPts val="800"/>
-              </a:spcBef>
-              <a:defRPr sz="1700">
-                <a:solidFill>
-                  <a:srgbClr val="FFFFFF"/>
-                </a:solidFill>
-                <a:latin typeface="Arial"/>
-              </a:defRPr>
-            </a:pPr>
-            <a:r>
-              <a:t>⚠️ Важно: Всегда проверяйте перевод технических терминов. GENAi может ошибаться в специфической лексике.</a:t>
+              <a:t>→ Результат: улучшенное ТЗ с недостающими пунктами.</a:t>
             </a:r>
           </a:p>
         </p:txBody>
@@ -3813,7 +4177,7 @@
           <a:lstStyle/>
           <a:p>
             <a:pPr>
-              <a:defRPr sz="3600" b="1">
+              <a:defRPr sz="3200" b="1">
                 <a:solidFill>
                   <a:srgbClr val="00D4FF"/>
                 </a:solidFill>
@@ -3821,102 +4185,21 @@
               </a:defRPr>
             </a:pPr>
             <a:r>
-              <a:t>Практика — 2 задания по 15 минут</a:t>
-            </a:r>
-          </a:p>
-        </p:txBody>
-      </p:sp>
-      <p:sp>
-        <p:nvSpPr>
-          <p:cNvPr id="3" name="Rectangle 2"/>
-          <p:cNvSpPr/>
-          <p:nvPr/>
-        </p:nvSpPr>
-        <p:spPr>
-          <a:xfrm>
-            <a:off x="457200" y="1371600"/>
-            <a:ext cx="5303520" cy="4572000"/>
-          </a:xfrm>
-          <a:prstGeom prst="rect">
-            <a:avLst/>
-          </a:prstGeom>
-          <a:solidFill>
-            <a:srgbClr val="14141E"/>
-          </a:solidFill>
-          <a:ln>
-            <a:solidFill>
-              <a:srgbClr val="28283C"/>
-            </a:solidFill>
-          </a:ln>
-        </p:spPr>
-        <p:style>
-          <a:lnRef idx="1">
-            <a:schemeClr val="accent1"/>
-          </a:lnRef>
-          <a:fillRef idx="3">
-            <a:schemeClr val="accent1"/>
-          </a:fillRef>
-          <a:effectRef idx="2">
-            <a:schemeClr val="accent1"/>
-          </a:effectRef>
-          <a:fontRef idx="minor">
-            <a:schemeClr val="lt1"/>
-          </a:fontRef>
-        </p:style>
-        <p:txBody>
-          <a:bodyPr rtlCol="0" anchor="ctr"/>
-          <a:lstStyle/>
-          <a:p>
-            <a:pPr algn="ctr"/>
-          </a:p>
-        </p:txBody>
-      </p:sp>
-      <p:sp>
-        <p:nvSpPr>
-          <p:cNvPr id="4" name="TextBox 3"/>
+              <a:t>Демо 2: Конкурентный лист из 3 КП</a:t>
+            </a:r>
+          </a:p>
+        </p:txBody>
+      </p:sp>
+      <p:sp>
+        <p:nvSpPr>
+          <p:cNvPr id="3" name="TextBox 2"/>
           <p:cNvSpPr txBox="1"/>
           <p:nvPr/>
         </p:nvSpPr>
         <p:spPr>
           <a:xfrm>
-            <a:off x="548640" y="1645920"/>
-            <a:ext cx="5120640" cy="914400"/>
-          </a:xfrm>
-          <a:prstGeom prst="rect">
-            <a:avLst/>
-          </a:prstGeom>
-          <a:noFill/>
-        </p:spPr>
-        <p:txBody>
-          <a:bodyPr wrap="none">
-            <a:spAutoFit/>
-          </a:bodyPr>
-          <a:lstStyle/>
-          <a:p>
-            <a:pPr algn="ctr">
-              <a:defRPr sz="2800" b="1">
-                <a:solidFill>
-                  <a:srgbClr val="00D4FF"/>
-                </a:solidFill>
-                <a:latin typeface="Arial"/>
-              </a:defRPr>
-            </a:pPr>
-            <a:r>
-              <a:t>Задание 1</a:t>
-            </a:r>
-          </a:p>
-        </p:txBody>
-      </p:sp>
-      <p:sp>
-        <p:nvSpPr>
-          <p:cNvPr id="5" name="TextBox 4"/>
-          <p:cNvSpPr txBox="1"/>
-          <p:nvPr/>
-        </p:nvSpPr>
-        <p:spPr>
-          <a:xfrm>
-            <a:off x="548640" y="2743200"/>
-            <a:ext cx="5120640" cy="2743200"/>
+            <a:off x="457200" y="1097280"/>
+            <a:ext cx="11247120" cy="5303520"/>
           </a:xfrm>
           <a:prstGeom prst="rect">
             <a:avLst/>
@@ -3929,139 +4212,114 @@
           </a:bodyPr>
           <a:lstStyle/>
           <a:p>
-            <a:pPr algn="ctr">
+            <a:pPr>
               <a:lnSpc>
                 <a:spcPct val="130000"/>
               </a:lnSpc>
-              <a:defRPr sz="1600">
-                <a:solidFill>
-                  <a:srgbClr val="CBD5E1"/>
-                </a:solidFill>
-                <a:latin typeface="Arial"/>
-              </a:defRPr>
-            </a:pPr>
-            <a:r>
-              <a:t>Составить ТЗ на закупку ферросплавов (выберите любой: ферромарганец, феррохром, кремний) через GENAi. Использовать РКЗФО + Eval.</a:t>
-            </a:r>
-          </a:p>
-        </p:txBody>
-      </p:sp>
-      <p:sp>
-        <p:nvSpPr>
-          <p:cNvPr id="6" name="Rectangle 5"/>
-          <p:cNvSpPr/>
-          <p:nvPr/>
-        </p:nvSpPr>
-        <p:spPr>
-          <a:xfrm>
-            <a:off x="5943600" y="1371600"/>
-            <a:ext cx="5303520" cy="4572000"/>
-          </a:xfrm>
-          <a:prstGeom prst="rect">
-            <a:avLst/>
-          </a:prstGeom>
-          <a:solidFill>
-            <a:srgbClr val="14141E"/>
-          </a:solidFill>
-          <a:ln>
-            <a:solidFill>
-              <a:srgbClr val="28283C"/>
-            </a:solidFill>
-          </a:ln>
-        </p:spPr>
-        <p:style>
-          <a:lnRef idx="1">
-            <a:schemeClr val="accent1"/>
-          </a:lnRef>
-          <a:fillRef idx="3">
-            <a:schemeClr val="accent1"/>
-          </a:fillRef>
-          <a:effectRef idx="2">
-            <a:schemeClr val="accent1"/>
-          </a:effectRef>
-          <a:fontRef idx="minor">
-            <a:schemeClr val="lt1"/>
-          </a:fontRef>
-        </p:style>
-        <p:txBody>
-          <a:bodyPr rtlCol="0" anchor="ctr"/>
-          <a:lstStyle/>
-          <a:p>
-            <a:pPr algn="ctr"/>
-          </a:p>
-        </p:txBody>
-      </p:sp>
-      <p:sp>
-        <p:nvSpPr>
-          <p:cNvPr id="7" name="TextBox 6"/>
-          <p:cNvSpPr txBox="1"/>
-          <p:nvPr/>
-        </p:nvSpPr>
-        <p:spPr>
-          <a:xfrm>
-            <a:off x="6035040" y="1645920"/>
-            <a:ext cx="5120640" cy="914400"/>
-          </a:xfrm>
-          <a:prstGeom prst="rect">
-            <a:avLst/>
-          </a:prstGeom>
-          <a:noFill/>
-        </p:spPr>
-        <p:txBody>
-          <a:bodyPr wrap="none">
-            <a:spAutoFit/>
-          </a:bodyPr>
-          <a:lstStyle/>
-          <a:p>
-            <a:pPr algn="ctr">
-              <a:defRPr sz="2800" b="1">
-                <a:solidFill>
-                  <a:srgbClr val="00D4FF"/>
-                </a:solidFill>
-                <a:latin typeface="Arial"/>
-              </a:defRPr>
-            </a:pPr>
-            <a:r>
-              <a:t>Задание 2</a:t>
-            </a:r>
-          </a:p>
-        </p:txBody>
-      </p:sp>
-      <p:sp>
-        <p:nvSpPr>
-          <p:cNvPr id="8" name="TextBox 7"/>
-          <p:cNvSpPr txBox="1"/>
-          <p:nvPr/>
-        </p:nvSpPr>
-        <p:spPr>
-          <a:xfrm>
-            <a:off x="6035040" y="2743200"/>
-            <a:ext cx="5120640" cy="2743200"/>
-          </a:xfrm>
-          <a:prstGeom prst="rect">
-            <a:avLst/>
-          </a:prstGeom>
-          <a:noFill/>
-        </p:spPr>
-        <p:txBody>
-          <a:bodyPr wrap="square">
-            <a:spAutoFit/>
-          </a:bodyPr>
-          <a:lstStyle/>
-          <a:p>
-            <a:pPr algn="ctr">
+              <a:spcBef>
+                <a:spcPts val="800"/>
+              </a:spcBef>
+              <a:defRPr sz="1700">
+                <a:solidFill>
+                  <a:srgbClr val="FFFFFF"/>
+                </a:solidFill>
+                <a:latin typeface="Arial"/>
+              </a:defRPr>
+            </a:pPr>
+            <a:r>
+              <a:t>Сценарий: получили 3 предложения на графитированные электроды УHP 450 мм (100 шт).</a:t>
+            </a:r>
+          </a:p>
+          <a:p>
+            <a:pPr>
               <a:lnSpc>
                 <a:spcPct val="130000"/>
               </a:lnSpc>
-              <a:defRPr sz="1600">
-                <a:solidFill>
-                  <a:srgbClr val="CBD5E1"/>
-                </a:solidFill>
-                <a:latin typeface="Arial"/>
-              </a:defRPr>
-            </a:pPr>
-            <a:r>
-              <a:t>Перевести фрагмент ТКП от иностранного поставщика (предоставим текст) или сформировать конкурентный лист из 3 предложений.</a:t>
+              <a:spcBef>
+                <a:spcPts val="800"/>
+              </a:spcBef>
+              <a:defRPr sz="1700">
+                <a:solidFill>
+                  <a:srgbClr val="FFFFFF"/>
+                </a:solidFill>
+                <a:latin typeface="Arial"/>
+              </a:defRPr>
+            </a:pPr>
+            <a:r>
+              <a:t>Данные:</a:t>
+            </a:r>
+            <a:br/>
+            <a:r>
+              <a:t>• Поставщик А (Китай): $4200/т, 45 дней, гарантия 6 мес, оплата 30/70, доставка CIF</a:t>
+            </a:r>
+            <a:br/>
+            <a:r>
+              <a:t>• Поставщик Б (РФ): $5100/т, 14 дней, гарантия 12 мес, оплата 50/50, доставка самовывоз</a:t>
+            </a:r>
+            <a:br/>
+            <a:r>
+              <a:t>• Поставщик В (Индия): $3900/т, 60 дней, гарантия 3 мес, оплата 100% предоплата, доставка CIF</a:t>
+            </a:r>
+          </a:p>
+          <a:p>
+            <a:pPr>
+              <a:lnSpc>
+                <a:spcPct val="130000"/>
+              </a:lnSpc>
+              <a:spcBef>
+                <a:spcPts val="800"/>
+              </a:spcBef>
+              <a:defRPr sz="1700">
+                <a:solidFill>
+                  <a:srgbClr val="FFFFFF"/>
+                </a:solidFill>
+                <a:latin typeface="Arial"/>
+              </a:defRPr>
+            </a:pPr>
+            <a:r>
+              <a:t>Промпт:</a:t>
+            </a:r>
+            <a:br/>
+            <a:r>
+              <a:t>Роль: аналитик закупок металлургического сырья. Задача: сформировать конкурентный лист. Требования: таблица сравнения + критерии оценки (цена 35%, срок 25%, гарантия 20%, условия 20%) + рейтинг 1-5 по каждому критерию + итоговый рейтинг + рекомендация с обоснованием.</a:t>
+            </a:r>
+          </a:p>
+          <a:p>
+            <a:pPr>
+              <a:lnSpc>
+                <a:spcPct val="130000"/>
+              </a:lnSpc>
+              <a:spcBef>
+                <a:spcPts val="800"/>
+              </a:spcBef>
+              <a:defRPr sz="1700">
+                <a:solidFill>
+                  <a:srgbClr val="FFFFFF"/>
+                </a:solidFill>
+                <a:latin typeface="Arial"/>
+              </a:defRPr>
+            </a:pPr>
+            <a:r>
+              <a:t>Результат: таблица с взвешенными оценками, итоговый рейтинг, рекомендация с цифрами.</a:t>
+            </a:r>
+          </a:p>
+          <a:p>
+            <a:pPr>
+              <a:lnSpc>
+                <a:spcPct val="130000"/>
+              </a:lnSpc>
+              <a:spcBef>
+                <a:spcPts val="800"/>
+              </a:spcBef>
+              <a:defRPr sz="1700">
+                <a:solidFill>
+                  <a:srgbClr val="FFFFFF"/>
+                </a:solidFill>
+                <a:latin typeface="Arial"/>
+              </a:defRPr>
+            </a:pPr>
+            <a:r>
+              <a:t>Eval: 'Какие риски не учтены? Что проверить у поставщиков? Какие скрытые затраты (таможня, НДС)?'</a:t>
             </a:r>
           </a:p>
         </p:txBody>
@@ -4123,102 +4381,21 @@
               </a:defRPr>
             </a:pPr>
             <a:r>
-              <a:t>Готовые шаблоны для GENAi</a:t>
-            </a:r>
-          </a:p>
-        </p:txBody>
-      </p:sp>
-      <p:sp>
-        <p:nvSpPr>
-          <p:cNvPr id="3" name="Rectangle 2"/>
-          <p:cNvSpPr/>
-          <p:nvPr/>
-        </p:nvSpPr>
-        <p:spPr>
-          <a:xfrm>
-            <a:off x="457200" y="1188720"/>
-            <a:ext cx="5303520" cy="2331720"/>
-          </a:xfrm>
-          <a:prstGeom prst="rect">
-            <a:avLst/>
-          </a:prstGeom>
-          <a:solidFill>
-            <a:srgbClr val="14141E"/>
-          </a:solidFill>
-          <a:ln>
-            <a:solidFill>
-              <a:srgbClr val="28283C"/>
-            </a:solidFill>
-          </a:ln>
-        </p:spPr>
-        <p:style>
-          <a:lnRef idx="1">
-            <a:schemeClr val="accent1"/>
-          </a:lnRef>
-          <a:fillRef idx="3">
-            <a:schemeClr val="accent1"/>
-          </a:fillRef>
-          <a:effectRef idx="2">
-            <a:schemeClr val="accent1"/>
-          </a:effectRef>
-          <a:fontRef idx="minor">
-            <a:schemeClr val="lt1"/>
-          </a:fontRef>
-        </p:style>
-        <p:txBody>
-          <a:bodyPr rtlCol="0" anchor="ctr"/>
-          <a:lstStyle/>
-          <a:p>
-            <a:pPr algn="ctr"/>
-          </a:p>
-        </p:txBody>
-      </p:sp>
-      <p:sp>
-        <p:nvSpPr>
-          <p:cNvPr id="4" name="TextBox 3"/>
+              <a:t>Демо 3: Перевод ТКП и переписка с поставщиками</a:t>
+            </a:r>
+          </a:p>
+        </p:txBody>
+      </p:sp>
+      <p:sp>
+        <p:nvSpPr>
+          <p:cNvPr id="3" name="TextBox 2"/>
           <p:cNvSpPr txBox="1"/>
           <p:nvPr/>
         </p:nvSpPr>
         <p:spPr>
           <a:xfrm>
-            <a:off x="548640" y="1325880"/>
-            <a:ext cx="5120640" cy="457200"/>
-          </a:xfrm>
-          <a:prstGeom prst="rect">
-            <a:avLst/>
-          </a:prstGeom>
-          <a:noFill/>
-        </p:spPr>
-        <p:txBody>
-          <a:bodyPr wrap="none">
-            <a:spAutoFit/>
-          </a:bodyPr>
-          <a:lstStyle/>
-          <a:p>
-            <a:pPr>
-              <a:defRPr sz="1800" b="1">
-                <a:solidFill>
-                  <a:srgbClr val="FFFFFF"/>
-                </a:solidFill>
-                <a:latin typeface="Arial"/>
-              </a:defRPr>
-            </a:pPr>
-            <a:r>
-              <a:t>ТЗ_закупка</a:t>
-            </a:r>
-          </a:p>
-        </p:txBody>
-      </p:sp>
-      <p:sp>
-        <p:nvSpPr>
-          <p:cNvPr id="5" name="TextBox 4"/>
-          <p:cNvSpPr txBox="1"/>
-          <p:nvPr/>
-        </p:nvSpPr>
-        <p:spPr>
-          <a:xfrm>
-            <a:off x="548640" y="1828800"/>
-            <a:ext cx="5120640" cy="1600200"/>
+            <a:off x="457200" y="1097280"/>
+            <a:ext cx="11247120" cy="5303520"/>
           </a:xfrm>
           <a:prstGeom prst="rect">
             <a:avLst/>
@@ -4233,90 +4410,12 @@
           <a:p>
             <a:pPr>
               <a:lnSpc>
-                <a:spcPct val="120000"/>
+                <a:spcPct val="130000"/>
               </a:lnSpc>
-              <a:defRPr sz="1400">
-                <a:solidFill>
-                  <a:srgbClr val="CBD5E1"/>
-                </a:solidFill>
-                <a:latin typeface="Arial"/>
-              </a:defRPr>
-            </a:pPr>
-            <a:r>
-              <a:t>Роль + Контекст + Задача + Формат (5 разделов) + Ограничения. Готовое ТЗ за 2 минуты.</a:t>
-            </a:r>
-          </a:p>
-        </p:txBody>
-      </p:sp>
-      <p:sp>
-        <p:nvSpPr>
-          <p:cNvPr id="6" name="Rectangle 5"/>
-          <p:cNvSpPr/>
-          <p:nvPr/>
-        </p:nvSpPr>
-        <p:spPr>
-          <a:xfrm>
-            <a:off x="5943600" y="1188720"/>
-            <a:ext cx="5303520" cy="2331720"/>
-          </a:xfrm>
-          <a:prstGeom prst="rect">
-            <a:avLst/>
-          </a:prstGeom>
-          <a:solidFill>
-            <a:srgbClr val="14141E"/>
-          </a:solidFill>
-          <a:ln>
-            <a:solidFill>
-              <a:srgbClr val="28283C"/>
-            </a:solidFill>
-          </a:ln>
-        </p:spPr>
-        <p:style>
-          <a:lnRef idx="1">
-            <a:schemeClr val="accent1"/>
-          </a:lnRef>
-          <a:fillRef idx="3">
-            <a:schemeClr val="accent1"/>
-          </a:fillRef>
-          <a:effectRef idx="2">
-            <a:schemeClr val="accent1"/>
-          </a:effectRef>
-          <a:fontRef idx="minor">
-            <a:schemeClr val="lt1"/>
-          </a:fontRef>
-        </p:style>
-        <p:txBody>
-          <a:bodyPr rtlCol="0" anchor="ctr"/>
-          <a:lstStyle/>
-          <a:p>
-            <a:pPr algn="ctr"/>
-          </a:p>
-        </p:txBody>
-      </p:sp>
-      <p:sp>
-        <p:nvSpPr>
-          <p:cNvPr id="7" name="TextBox 6"/>
-          <p:cNvSpPr txBox="1"/>
-          <p:nvPr/>
-        </p:nvSpPr>
-        <p:spPr>
-          <a:xfrm>
-            <a:off x="6035040" y="1325880"/>
-            <a:ext cx="5120640" cy="457200"/>
-          </a:xfrm>
-          <a:prstGeom prst="rect">
-            <a:avLst/>
-          </a:prstGeom>
-          <a:noFill/>
-        </p:spPr>
-        <p:txBody>
-          <a:bodyPr wrap="none">
-            <a:spAutoFit/>
-          </a:bodyPr>
-          <a:lstStyle/>
-          <a:p>
-            <a:pPr>
-              <a:defRPr sz="1800" b="1">
+              <a:spcBef>
+                <a:spcPts val="800"/>
+              </a:spcBef>
+              <a:defRPr sz="1700">
                 <a:solidFill>
                   <a:srgbClr val="FFFFFF"/>
                 </a:solidFill>
@@ -4324,119 +4423,18 @@
               </a:defRPr>
             </a:pPr>
             <a:r>
-              <a:t>конкурентный_лист</a:t>
-            </a:r>
-          </a:p>
-        </p:txBody>
-      </p:sp>
-      <p:sp>
-        <p:nvSpPr>
-          <p:cNvPr id="8" name="TextBox 7"/>
-          <p:cNvSpPr txBox="1"/>
-          <p:nvPr/>
-        </p:nvSpPr>
-        <p:spPr>
-          <a:xfrm>
-            <a:off x="6035040" y="1828800"/>
-            <a:ext cx="5120640" cy="1600200"/>
-          </a:xfrm>
-          <a:prstGeom prst="rect">
-            <a:avLst/>
-          </a:prstGeom>
-          <a:noFill/>
-        </p:spPr>
-        <p:txBody>
-          <a:bodyPr wrap="square">
-            <a:spAutoFit/>
-          </a:bodyPr>
-          <a:lstStyle/>
+              <a:t>Сценарий: получили ТКП от китайского поставщика на огнеупорные материалы. Нужно перевести и подготовить ответ.</a:t>
+            </a:r>
+          </a:p>
           <a:p>
             <a:pPr>
               <a:lnSpc>
-                <a:spcPct val="120000"/>
+                <a:spcPct val="130000"/>
               </a:lnSpc>
-              <a:defRPr sz="1400">
-                <a:solidFill>
-                  <a:srgbClr val="CBD5E1"/>
-                </a:solidFill>
-                <a:latin typeface="Arial"/>
-              </a:defRPr>
-            </a:pPr>
-            <a:r>
-              <a:t>3+ предложения → таблица → критерии с весами → рейтинг 1-5 → итоговый рейтинг → рекомендация.</a:t>
-            </a:r>
-          </a:p>
-        </p:txBody>
-      </p:sp>
-      <p:sp>
-        <p:nvSpPr>
-          <p:cNvPr id="9" name="Rectangle 8"/>
-          <p:cNvSpPr/>
-          <p:nvPr/>
-        </p:nvSpPr>
-        <p:spPr>
-          <a:xfrm>
-            <a:off x="457200" y="3703320"/>
-            <a:ext cx="5303520" cy="2331720"/>
-          </a:xfrm>
-          <a:prstGeom prst="rect">
-            <a:avLst/>
-          </a:prstGeom>
-          <a:solidFill>
-            <a:srgbClr val="14141E"/>
-          </a:solidFill>
-          <a:ln>
-            <a:solidFill>
-              <a:srgbClr val="28283C"/>
-            </a:solidFill>
-          </a:ln>
-        </p:spPr>
-        <p:style>
-          <a:lnRef idx="1">
-            <a:schemeClr val="accent1"/>
-          </a:lnRef>
-          <a:fillRef idx="3">
-            <a:schemeClr val="accent1"/>
-          </a:fillRef>
-          <a:effectRef idx="2">
-            <a:schemeClr val="accent1"/>
-          </a:effectRef>
-          <a:fontRef idx="minor">
-            <a:schemeClr val="lt1"/>
-          </a:fontRef>
-        </p:style>
-        <p:txBody>
-          <a:bodyPr rtlCol="0" anchor="ctr"/>
-          <a:lstStyle/>
-          <a:p>
-            <a:pPr algn="ctr"/>
-          </a:p>
-        </p:txBody>
-      </p:sp>
-      <p:sp>
-        <p:nvSpPr>
-          <p:cNvPr id="10" name="TextBox 9"/>
-          <p:cNvSpPr txBox="1"/>
-          <p:nvPr/>
-        </p:nvSpPr>
-        <p:spPr>
-          <a:xfrm>
-            <a:off x="548640" y="3840480"/>
-            <a:ext cx="5120640" cy="457200"/>
-          </a:xfrm>
-          <a:prstGeom prst="rect">
-            <a:avLst/>
-          </a:prstGeom>
-          <a:noFill/>
-        </p:spPr>
-        <p:txBody>
-          <a:bodyPr wrap="none">
-            <a:spAutoFit/>
-          </a:bodyPr>
-          <a:lstStyle/>
-          <a:p>
-            <a:pPr>
-              <a:defRPr sz="1800" b="1">
+              <a:spcBef>
+                <a:spcPts val="800"/>
+              </a:spcBef>
+              <a:defRPr sz="1700">
                 <a:solidFill>
                   <a:srgbClr val="FFFFFF"/>
                 </a:solidFill>
@@ -4444,46 +4442,80 @@
               </a:defRPr>
             </a:pPr>
             <a:r>
-              <a:t>перевод_ТКП</a:t>
-            </a:r>
-          </a:p>
-        </p:txBody>
-      </p:sp>
-      <p:sp>
-        <p:nvSpPr>
-          <p:cNvPr id="11" name="TextBox 10"/>
-          <p:cNvSpPr txBox="1"/>
-          <p:nvPr/>
-        </p:nvSpPr>
-        <p:spPr>
-          <a:xfrm>
-            <a:off x="548640" y="4343400"/>
-            <a:ext cx="5120640" cy="1600200"/>
-          </a:xfrm>
-          <a:prstGeom prst="rect">
-            <a:avLst/>
-          </a:prstGeom>
-          <a:noFill/>
-        </p:spPr>
-        <p:txBody>
-          <a:bodyPr wrap="square">
-            <a:spAutoFit/>
-          </a:bodyPr>
-          <a:lstStyle/>
+              <a:t>Шаг 1 — Перевод ТКП:</a:t>
+            </a:r>
+            <a:br/>
+            <a:r>
+              <a:t>[Загрузить PDF через скрепку]</a:t>
+            </a:r>
+          </a:p>
           <a:p>
             <a:pPr>
               <a:lnSpc>
-                <a:spcPct val="120000"/>
+                <a:spcPct val="130000"/>
               </a:lnSpc>
-              <a:defRPr sz="1400">
-                <a:solidFill>
-                  <a:srgbClr val="CBD5E1"/>
-                </a:solidFill>
-                <a:latin typeface="Arial"/>
-              </a:defRPr>
-            </a:pPr>
-            <a:r>
-              <a:t>Загрузка PDF → перевод с сохранением таблиц и терминов → проверка технических деталей.</a:t>
+              <a:spcBef>
+                <a:spcPts val="800"/>
+              </a:spcBef>
+              <a:defRPr sz="1700">
+                <a:solidFill>
+                  <a:srgbClr val="FFFFFF"/>
+                </a:solidFill>
+                <a:latin typeface="Arial"/>
+              </a:defRPr>
+            </a:pPr>
+            <a:r>
+              <a:t>Промпт:</a:t>
+            </a:r>
+            <a:br/>
+            <a:r>
+              <a:t>'Роль: переводчик технических текстов. Задача: перевести ТКП с китайского на русский. Сохранить таблицы, цифры, технические термины. Формат: русский текст с оригинальными названиями в скобках. Ограничения: не упрощай, сохрани все технические детали.'</a:t>
+            </a:r>
+          </a:p>
+          <a:p>
+            <a:pPr>
+              <a:lnSpc>
+                <a:spcPct val="130000"/>
+              </a:lnSpc>
+              <a:spcBef>
+                <a:spcPts val="800"/>
+              </a:spcBef>
+              <a:defRPr sz="1700">
+                <a:solidFill>
+                  <a:srgbClr val="FFFFFF"/>
+                </a:solidFill>
+                <a:latin typeface="Arial"/>
+              </a:defRPr>
+            </a:pPr>
+            <a:r>
+              <a:t>Шаг 2 — Подготовка ответа поставщику:</a:t>
+            </a:r>
+            <a:br/>
+            <a:r>
+              <a:t>Промпт:</a:t>
+            </a:r>
+            <a:br/>
+            <a:r>
+              <a:t>'Роль: менеджер по закупкам. Задача: написать ответное письмо китайскому поставщику на английском. Контекст: мы рассматриваем их ТКП, но цена выше рынка на 15%. Просим скидку или альтернативные марки. Тон: деловой, вежливый, но твёрдый. Формат: деловое письмо. Ограничения: без обещаний, укажем, что решение через 2 недели.'</a:t>
+            </a:r>
+          </a:p>
+          <a:p>
+            <a:pPr>
+              <a:lnSpc>
+                <a:spcPct val="130000"/>
+              </a:lnSpc>
+              <a:spcBef>
+                <a:spcPts val="800"/>
+              </a:spcBef>
+              <a:defRPr sz="1700">
+                <a:solidFill>
+                  <a:srgbClr val="FFFFFF"/>
+                </a:solidFill>
+                <a:latin typeface="Arial"/>
+              </a:defRPr>
+            </a:pPr>
+            <a:r>
+              <a:t>⚠️ Важно: Всегда проверяйте перевод технических терминов. GENAi может ошибаться в специфической лексике.</a:t>
             </a:r>
           </a:p>
         </p:txBody>
@@ -4537,7 +4569,7 @@
           <a:lstStyle/>
           <a:p>
             <a:pPr>
-              <a:defRPr sz="3200" b="1">
+              <a:defRPr sz="3600" b="1">
                 <a:solidFill>
                   <a:srgbClr val="00D4FF"/>
                 </a:solidFill>
@@ -4545,21 +4577,102 @@
               </a:defRPr>
             </a:pPr>
             <a:r>
-              <a:t>Домашнее задание</a:t>
-            </a:r>
-          </a:p>
-        </p:txBody>
-      </p:sp>
-      <p:sp>
-        <p:nvSpPr>
-          <p:cNvPr id="3" name="TextBox 2"/>
+              <a:t>Практика — 2 задания по 15 минут</a:t>
+            </a:r>
+          </a:p>
+        </p:txBody>
+      </p:sp>
+      <p:sp>
+        <p:nvSpPr>
+          <p:cNvPr id="3" name="Rectangle 2"/>
+          <p:cNvSpPr/>
+          <p:nvPr/>
+        </p:nvSpPr>
+        <p:spPr>
+          <a:xfrm>
+            <a:off x="457200" y="1371600"/>
+            <a:ext cx="5303520" cy="4572000"/>
+          </a:xfrm>
+          <a:prstGeom prst="rect">
+            <a:avLst/>
+          </a:prstGeom>
+          <a:solidFill>
+            <a:srgbClr val="14141E"/>
+          </a:solidFill>
+          <a:ln>
+            <a:solidFill>
+              <a:srgbClr val="28283C"/>
+            </a:solidFill>
+          </a:ln>
+        </p:spPr>
+        <p:style>
+          <a:lnRef idx="1">
+            <a:schemeClr val="accent1"/>
+          </a:lnRef>
+          <a:fillRef idx="3">
+            <a:schemeClr val="accent1"/>
+          </a:fillRef>
+          <a:effectRef idx="2">
+            <a:schemeClr val="accent1"/>
+          </a:effectRef>
+          <a:fontRef idx="minor">
+            <a:schemeClr val="lt1"/>
+          </a:fontRef>
+        </p:style>
+        <p:txBody>
+          <a:bodyPr rtlCol="0" anchor="ctr"/>
+          <a:lstStyle/>
+          <a:p>
+            <a:pPr algn="ctr"/>
+          </a:p>
+        </p:txBody>
+      </p:sp>
+      <p:sp>
+        <p:nvSpPr>
+          <p:cNvPr id="4" name="TextBox 3"/>
           <p:cNvSpPr txBox="1"/>
           <p:nvPr/>
         </p:nvSpPr>
         <p:spPr>
           <a:xfrm>
-            <a:off x="457200" y="1097280"/>
-            <a:ext cx="11247120" cy="5303520"/>
+            <a:off x="548640" y="1645920"/>
+            <a:ext cx="5120640" cy="914400"/>
+          </a:xfrm>
+          <a:prstGeom prst="rect">
+            <a:avLst/>
+          </a:prstGeom>
+          <a:noFill/>
+        </p:spPr>
+        <p:txBody>
+          <a:bodyPr wrap="none">
+            <a:spAutoFit/>
+          </a:bodyPr>
+          <a:lstStyle/>
+          <a:p>
+            <a:pPr algn="ctr">
+              <a:defRPr sz="2800" b="1">
+                <a:solidFill>
+                  <a:srgbClr val="00D4FF"/>
+                </a:solidFill>
+                <a:latin typeface="Arial"/>
+              </a:defRPr>
+            </a:pPr>
+            <a:r>
+              <a:t>Задание 1</a:t>
+            </a:r>
+          </a:p>
+        </p:txBody>
+      </p:sp>
+      <p:sp>
+        <p:nvSpPr>
+          <p:cNvPr id="5" name="TextBox 4"/>
+          <p:cNvSpPr txBox="1"/>
+          <p:nvPr/>
+        </p:nvSpPr>
+        <p:spPr>
+          <a:xfrm>
+            <a:off x="548640" y="2743200"/>
+            <a:ext cx="5120640" cy="2743200"/>
           </a:xfrm>
           <a:prstGeom prst="rect">
             <a:avLst/>
@@ -4572,126 +4685,139 @@
           </a:bodyPr>
           <a:lstStyle/>
           <a:p>
-            <a:pPr>
+            <a:pPr algn="ctr">
               <a:lnSpc>
                 <a:spcPct val="130000"/>
               </a:lnSpc>
-              <a:spcBef>
-                <a:spcPts val="800"/>
-              </a:spcBef>
-              <a:defRPr sz="1700">
-                <a:solidFill>
-                  <a:srgbClr val="FFFFFF"/>
-                </a:solidFill>
-                <a:latin typeface="Arial"/>
-              </a:defRPr>
-            </a:pPr>
-            <a:r>
-              <a:t>Выберите одну из ваших текущих закупок (металлургическое сырьё, ферросплавы, огнеупоры, электроды):</a:t>
-            </a:r>
-          </a:p>
-          <a:p>
-            <a:pPr>
+              <a:defRPr sz="1600">
+                <a:solidFill>
+                  <a:srgbClr val="CBD5E1"/>
+                </a:solidFill>
+                <a:latin typeface="Arial"/>
+              </a:defRPr>
+            </a:pPr>
+            <a:r>
+              <a:t>Составить ТЗ на закупку ферросплавов (выберите любой: ферромарганец, феррохром, кремний) через GENAi. Использовать РКЗФО + Eval.</a:t>
+            </a:r>
+          </a:p>
+        </p:txBody>
+      </p:sp>
+      <p:sp>
+        <p:nvSpPr>
+          <p:cNvPr id="6" name="Rectangle 5"/>
+          <p:cNvSpPr/>
+          <p:nvPr/>
+        </p:nvSpPr>
+        <p:spPr>
+          <a:xfrm>
+            <a:off x="5943600" y="1371600"/>
+            <a:ext cx="5303520" cy="4572000"/>
+          </a:xfrm>
+          <a:prstGeom prst="rect">
+            <a:avLst/>
+          </a:prstGeom>
+          <a:solidFill>
+            <a:srgbClr val="14141E"/>
+          </a:solidFill>
+          <a:ln>
+            <a:solidFill>
+              <a:srgbClr val="28283C"/>
+            </a:solidFill>
+          </a:ln>
+        </p:spPr>
+        <p:style>
+          <a:lnRef idx="1">
+            <a:schemeClr val="accent1"/>
+          </a:lnRef>
+          <a:fillRef idx="3">
+            <a:schemeClr val="accent1"/>
+          </a:fillRef>
+          <a:effectRef idx="2">
+            <a:schemeClr val="accent1"/>
+          </a:effectRef>
+          <a:fontRef idx="minor">
+            <a:schemeClr val="lt1"/>
+          </a:fontRef>
+        </p:style>
+        <p:txBody>
+          <a:bodyPr rtlCol="0" anchor="ctr"/>
+          <a:lstStyle/>
+          <a:p>
+            <a:pPr algn="ctr"/>
+          </a:p>
+        </p:txBody>
+      </p:sp>
+      <p:sp>
+        <p:nvSpPr>
+          <p:cNvPr id="7" name="TextBox 6"/>
+          <p:cNvSpPr txBox="1"/>
+          <p:nvPr/>
+        </p:nvSpPr>
+        <p:spPr>
+          <a:xfrm>
+            <a:off x="6035040" y="1645920"/>
+            <a:ext cx="5120640" cy="914400"/>
+          </a:xfrm>
+          <a:prstGeom prst="rect">
+            <a:avLst/>
+          </a:prstGeom>
+          <a:noFill/>
+        </p:spPr>
+        <p:txBody>
+          <a:bodyPr wrap="none">
+            <a:spAutoFit/>
+          </a:bodyPr>
+          <a:lstStyle/>
+          <a:p>
+            <a:pPr algn="ctr">
+              <a:defRPr sz="2800" b="1">
+                <a:solidFill>
+                  <a:srgbClr val="00D4FF"/>
+                </a:solidFill>
+                <a:latin typeface="Arial"/>
+              </a:defRPr>
+            </a:pPr>
+            <a:r>
+              <a:t>Задание 2</a:t>
+            </a:r>
+          </a:p>
+        </p:txBody>
+      </p:sp>
+      <p:sp>
+        <p:nvSpPr>
+          <p:cNvPr id="8" name="TextBox 7"/>
+          <p:cNvSpPr txBox="1"/>
+          <p:nvPr/>
+        </p:nvSpPr>
+        <p:spPr>
+          <a:xfrm>
+            <a:off x="6035040" y="2743200"/>
+            <a:ext cx="5120640" cy="2743200"/>
+          </a:xfrm>
+          <a:prstGeom prst="rect">
+            <a:avLst/>
+          </a:prstGeom>
+          <a:noFill/>
+        </p:spPr>
+        <p:txBody>
+          <a:bodyPr wrap="square">
+            <a:spAutoFit/>
+          </a:bodyPr>
+          <a:lstStyle/>
+          <a:p>
+            <a:pPr algn="ctr">
               <a:lnSpc>
                 <a:spcPct val="130000"/>
               </a:lnSpc>
-              <a:spcBef>
-                <a:spcPts val="800"/>
-              </a:spcBef>
-              <a:defRPr sz="1700">
-                <a:solidFill>
-                  <a:srgbClr val="FFFFFF"/>
-                </a:solidFill>
-                <a:latin typeface="Arial"/>
-              </a:defRPr>
-            </a:pPr>
-            <a:r>
-              <a:t>1. Составьте ТЗ с помощью ИИ (используйте РКЗФО)</a:t>
-            </a:r>
-            <a:br/>
-            <a:r>
-              <a:t>2. Проведите Eval (улучшите ТЗ)</a:t>
-            </a:r>
-            <a:br/>
-            <a:r>
-              <a:t>3. Если есть КП от иностранных поставщиков — переведите через GENAi</a:t>
-            </a:r>
-            <a:br/>
-            <a:r>
-              <a:t>4. Если нужно найти поставщиков — попробуйте через ИИ (проверьте реальность!)</a:t>
-            </a:r>
-          </a:p>
-          <a:p>
-            <a:pPr>
-              <a:lnSpc>
-                <a:spcPct val="130000"/>
-              </a:lnSpc>
-              <a:spcBef>
-                <a:spcPts val="800"/>
-              </a:spcBef>
-              <a:defRPr sz="1700">
-                <a:solidFill>
-                  <a:srgbClr val="FFFFFF"/>
-                </a:solidFill>
-                <a:latin typeface="Arial"/>
-              </a:defRPr>
-            </a:pPr>
-            <a:r>
-              <a:t>Формат сдачи:</a:t>
-            </a:r>
-            <a:br/>
-            <a:r>
-              <a:t>• Скриншот диалога с ИИ</a:t>
-            </a:r>
-            <a:br/>
-            <a:r>
-              <a:t>• Итоговый документ (ТЗ, перевод или конкурентный лист)</a:t>
-            </a:r>
-            <a:br/>
-            <a:r>
-              <a:t>• Короткое резюме: 'Что получилось / что не получилось / сколько времени сэкономил'</a:t>
-            </a:r>
-          </a:p>
-          <a:p>
-            <a:pPr>
-              <a:lnSpc>
-                <a:spcPct val="130000"/>
-              </a:lnSpc>
-              <a:spcBef>
-                <a:spcPts val="800"/>
-              </a:spcBef>
-              <a:defRPr sz="1700">
-                <a:solidFill>
-                  <a:srgbClr val="FFFFFF"/>
-                </a:solidFill>
-                <a:latin typeface="Arial"/>
-              </a:defRPr>
-            </a:pPr>
-            <a:r>
-              <a:t>Куда: чат #ai-help или email [внутренний]</a:t>
-            </a:r>
-            <a:br/>
-            <a:r>
-              <a:t>Дедлайн: до Урока 2</a:t>
-            </a:r>
-          </a:p>
-          <a:p>
-            <a:pPr>
-              <a:lnSpc>
-                <a:spcPct val="130000"/>
-              </a:lnSpc>
-              <a:spcBef>
-                <a:spcPts val="800"/>
-              </a:spcBef>
-              <a:defRPr sz="1700">
-                <a:solidFill>
-                  <a:srgbClr val="FFFFFF"/>
-                </a:solidFill>
-                <a:latin typeface="Arial"/>
-              </a:defRPr>
-            </a:pPr>
-            <a:r>
-              <a:t>💡 Совет: Не ждите идеального кейса. Попробуйте на чём угодно — даже на закупке канцелярии. Главное — привычка.</a:t>
+              <a:defRPr sz="1600">
+                <a:solidFill>
+                  <a:srgbClr val="CBD5E1"/>
+                </a:solidFill>
+                <a:latin typeface="Arial"/>
+              </a:defRPr>
+            </a:pPr>
+            <a:r>
+              <a:t>Перевести фрагмент ТКП от иностранного поставщика (предоставим текст) или сформировать конкурентный лист из 3 предложений.</a:t>
             </a:r>
           </a:p>
         </p:txBody>
@@ -4753,21 +4879,102 @@
               </a:defRPr>
             </a:pPr>
             <a:r>
-              <a:t>Что будет в Уроке 2: Анализ и выбор</a:t>
-            </a:r>
-          </a:p>
-        </p:txBody>
-      </p:sp>
-      <p:sp>
-        <p:nvSpPr>
-          <p:cNvPr id="3" name="TextBox 2"/>
+              <a:t>Готовые шаблоны для GENAi</a:t>
+            </a:r>
+          </a:p>
+        </p:txBody>
+      </p:sp>
+      <p:sp>
+        <p:nvSpPr>
+          <p:cNvPr id="3" name="Rectangle 2"/>
+          <p:cNvSpPr/>
+          <p:nvPr/>
+        </p:nvSpPr>
+        <p:spPr>
+          <a:xfrm>
+            <a:off x="457200" y="1188720"/>
+            <a:ext cx="5303520" cy="2331720"/>
+          </a:xfrm>
+          <a:prstGeom prst="rect">
+            <a:avLst/>
+          </a:prstGeom>
+          <a:solidFill>
+            <a:srgbClr val="14141E"/>
+          </a:solidFill>
+          <a:ln>
+            <a:solidFill>
+              <a:srgbClr val="28283C"/>
+            </a:solidFill>
+          </a:ln>
+        </p:spPr>
+        <p:style>
+          <a:lnRef idx="1">
+            <a:schemeClr val="accent1"/>
+          </a:lnRef>
+          <a:fillRef idx="3">
+            <a:schemeClr val="accent1"/>
+          </a:fillRef>
+          <a:effectRef idx="2">
+            <a:schemeClr val="accent1"/>
+          </a:effectRef>
+          <a:fontRef idx="minor">
+            <a:schemeClr val="lt1"/>
+          </a:fontRef>
+        </p:style>
+        <p:txBody>
+          <a:bodyPr rtlCol="0" anchor="ctr"/>
+          <a:lstStyle/>
+          <a:p>
+            <a:pPr algn="ctr"/>
+          </a:p>
+        </p:txBody>
+      </p:sp>
+      <p:sp>
+        <p:nvSpPr>
+          <p:cNvPr id="4" name="TextBox 3"/>
           <p:cNvSpPr txBox="1"/>
           <p:nvPr/>
         </p:nvSpPr>
         <p:spPr>
           <a:xfrm>
-            <a:off x="457200" y="1097280"/>
-            <a:ext cx="11247120" cy="5303520"/>
+            <a:off x="548640" y="1325880"/>
+            <a:ext cx="5120640" cy="457200"/>
+          </a:xfrm>
+          <a:prstGeom prst="rect">
+            <a:avLst/>
+          </a:prstGeom>
+          <a:noFill/>
+        </p:spPr>
+        <p:txBody>
+          <a:bodyPr wrap="none">
+            <a:spAutoFit/>
+          </a:bodyPr>
+          <a:lstStyle/>
+          <a:p>
+            <a:pPr>
+              <a:defRPr sz="1800" b="1">
+                <a:solidFill>
+                  <a:srgbClr val="FFFFFF"/>
+                </a:solidFill>
+                <a:latin typeface="Arial"/>
+              </a:defRPr>
+            </a:pPr>
+            <a:r>
+              <a:t>ТЗ_закупка</a:t>
+            </a:r>
+          </a:p>
+        </p:txBody>
+      </p:sp>
+      <p:sp>
+        <p:nvSpPr>
+          <p:cNvPr id="5" name="TextBox 4"/>
+          <p:cNvSpPr txBox="1"/>
+          <p:nvPr/>
+        </p:nvSpPr>
+        <p:spPr>
+          <a:xfrm>
+            <a:off x="548640" y="1828800"/>
+            <a:ext cx="5120640" cy="1600200"/>
           </a:xfrm>
           <a:prstGeom prst="rect">
             <a:avLst/>
@@ -4782,12 +4989,90 @@
           <a:p>
             <a:pPr>
               <a:lnSpc>
-                <a:spcPct val="130000"/>
+                <a:spcPct val="120000"/>
               </a:lnSpc>
-              <a:spcBef>
-                <a:spcPts val="800"/>
-              </a:spcBef>
-              <a:defRPr sz="1700">
+              <a:defRPr sz="1400">
+                <a:solidFill>
+                  <a:srgbClr val="CBD5E1"/>
+                </a:solidFill>
+                <a:latin typeface="Arial"/>
+              </a:defRPr>
+            </a:pPr>
+            <a:r>
+              <a:t>Роль + Контекст + Задача + Формат (5 разделов) + Ограничения. Готовое ТЗ за 2 минуты.</a:t>
+            </a:r>
+          </a:p>
+        </p:txBody>
+      </p:sp>
+      <p:sp>
+        <p:nvSpPr>
+          <p:cNvPr id="6" name="Rectangle 5"/>
+          <p:cNvSpPr/>
+          <p:nvPr/>
+        </p:nvSpPr>
+        <p:spPr>
+          <a:xfrm>
+            <a:off x="5943600" y="1188720"/>
+            <a:ext cx="5303520" cy="2331720"/>
+          </a:xfrm>
+          <a:prstGeom prst="rect">
+            <a:avLst/>
+          </a:prstGeom>
+          <a:solidFill>
+            <a:srgbClr val="14141E"/>
+          </a:solidFill>
+          <a:ln>
+            <a:solidFill>
+              <a:srgbClr val="28283C"/>
+            </a:solidFill>
+          </a:ln>
+        </p:spPr>
+        <p:style>
+          <a:lnRef idx="1">
+            <a:schemeClr val="accent1"/>
+          </a:lnRef>
+          <a:fillRef idx="3">
+            <a:schemeClr val="accent1"/>
+          </a:fillRef>
+          <a:effectRef idx="2">
+            <a:schemeClr val="accent1"/>
+          </a:effectRef>
+          <a:fontRef idx="minor">
+            <a:schemeClr val="lt1"/>
+          </a:fontRef>
+        </p:style>
+        <p:txBody>
+          <a:bodyPr rtlCol="0" anchor="ctr"/>
+          <a:lstStyle/>
+          <a:p>
+            <a:pPr algn="ctr"/>
+          </a:p>
+        </p:txBody>
+      </p:sp>
+      <p:sp>
+        <p:nvSpPr>
+          <p:cNvPr id="7" name="TextBox 6"/>
+          <p:cNvSpPr txBox="1"/>
+          <p:nvPr/>
+        </p:nvSpPr>
+        <p:spPr>
+          <a:xfrm>
+            <a:off x="6035040" y="1325880"/>
+            <a:ext cx="5120640" cy="457200"/>
+          </a:xfrm>
+          <a:prstGeom prst="rect">
+            <a:avLst/>
+          </a:prstGeom>
+          <a:noFill/>
+        </p:spPr>
+        <p:txBody>
+          <a:bodyPr wrap="none">
+            <a:spAutoFit/>
+          </a:bodyPr>
+          <a:lstStyle/>
+          <a:p>
+            <a:pPr>
+              <a:defRPr sz="1800" b="1">
                 <a:solidFill>
                   <a:srgbClr val="FFFFFF"/>
                 </a:solidFill>
@@ -4795,38 +5080,119 @@
               </a:defRPr>
             </a:pPr>
             <a:r>
-              <a:t>Следующее занятие:</a:t>
-            </a:r>
-            <a:br/>
-            <a:r>
-              <a:t>• Сравнение ТКП с техническим заданием — соответствуют ли предложения ТЗ?</a:t>
-            </a:r>
-            <a:br/>
-            <a:r>
-              <a:t>• Проверка договоров — риски, неопределённости, отсутствующие условия</a:t>
-            </a:r>
-            <a:br/>
-            <a:r>
-              <a:t>• Red Team анализ — ИИ играет против нас, чтобы найти слабые места</a:t>
-            </a:r>
-            <a:br/>
-            <a:r>
-              <a:t>• TCO (стоимость владения) — считаем не только цену, но и 3-летнюю стоимость</a:t>
-            </a:r>
-            <a:br/>
-            <a:r>
-              <a:t>• Обоснованная рекомендация с цифрами</a:t>
-            </a:r>
-          </a:p>
+              <a:t>конкурентный_лист</a:t>
+            </a:r>
+          </a:p>
+        </p:txBody>
+      </p:sp>
+      <p:sp>
+        <p:nvSpPr>
+          <p:cNvPr id="8" name="TextBox 7"/>
+          <p:cNvSpPr txBox="1"/>
+          <p:nvPr/>
+        </p:nvSpPr>
+        <p:spPr>
+          <a:xfrm>
+            <a:off x="6035040" y="1828800"/>
+            <a:ext cx="5120640" cy="1600200"/>
+          </a:xfrm>
+          <a:prstGeom prst="rect">
+            <a:avLst/>
+          </a:prstGeom>
+          <a:noFill/>
+        </p:spPr>
+        <p:txBody>
+          <a:bodyPr wrap="square">
+            <a:spAutoFit/>
+          </a:bodyPr>
+          <a:lstStyle/>
           <a:p>
             <a:pPr>
               <a:lnSpc>
-                <a:spcPct val="130000"/>
+                <a:spcPct val="120000"/>
               </a:lnSpc>
-              <a:spcBef>
-                <a:spcPts val="800"/>
-              </a:spcBef>
-              <a:defRPr sz="1700">
+              <a:defRPr sz="1400">
+                <a:solidFill>
+                  <a:srgbClr val="CBD5E1"/>
+                </a:solidFill>
+                <a:latin typeface="Arial"/>
+              </a:defRPr>
+            </a:pPr>
+            <a:r>
+              <a:t>3+ предложения → таблица → критерии с весами → рейтинг 1-5 → итоговый рейтинг → рекомендация.</a:t>
+            </a:r>
+          </a:p>
+        </p:txBody>
+      </p:sp>
+      <p:sp>
+        <p:nvSpPr>
+          <p:cNvPr id="9" name="Rectangle 8"/>
+          <p:cNvSpPr/>
+          <p:nvPr/>
+        </p:nvSpPr>
+        <p:spPr>
+          <a:xfrm>
+            <a:off x="457200" y="3703320"/>
+            <a:ext cx="5303520" cy="2331720"/>
+          </a:xfrm>
+          <a:prstGeom prst="rect">
+            <a:avLst/>
+          </a:prstGeom>
+          <a:solidFill>
+            <a:srgbClr val="14141E"/>
+          </a:solidFill>
+          <a:ln>
+            <a:solidFill>
+              <a:srgbClr val="28283C"/>
+            </a:solidFill>
+          </a:ln>
+        </p:spPr>
+        <p:style>
+          <a:lnRef idx="1">
+            <a:schemeClr val="accent1"/>
+          </a:lnRef>
+          <a:fillRef idx="3">
+            <a:schemeClr val="accent1"/>
+          </a:fillRef>
+          <a:effectRef idx="2">
+            <a:schemeClr val="accent1"/>
+          </a:effectRef>
+          <a:fontRef idx="minor">
+            <a:schemeClr val="lt1"/>
+          </a:fontRef>
+        </p:style>
+        <p:txBody>
+          <a:bodyPr rtlCol="0" anchor="ctr"/>
+          <a:lstStyle/>
+          <a:p>
+            <a:pPr algn="ctr"/>
+          </a:p>
+        </p:txBody>
+      </p:sp>
+      <p:sp>
+        <p:nvSpPr>
+          <p:cNvPr id="10" name="TextBox 9"/>
+          <p:cNvSpPr txBox="1"/>
+          <p:nvPr/>
+        </p:nvSpPr>
+        <p:spPr>
+          <a:xfrm>
+            <a:off x="548640" y="3840480"/>
+            <a:ext cx="5120640" cy="457200"/>
+          </a:xfrm>
+          <a:prstGeom prst="rect">
+            <a:avLst/>
+          </a:prstGeom>
+          <a:noFill/>
+        </p:spPr>
+        <p:txBody>
+          <a:bodyPr wrap="none">
+            <a:spAutoFit/>
+          </a:bodyPr>
+          <a:lstStyle/>
+          <a:p>
+            <a:pPr>
+              <a:defRPr sz="1800" b="1">
                 <a:solidFill>
                   <a:srgbClr val="FFFFFF"/>
                 </a:solidFill>
@@ -4834,19 +5200,46 @@
               </a:defRPr>
             </a:pPr>
             <a:r>
-              <a:t>Готовьте:</a:t>
-            </a:r>
-            <a:br/>
-            <a:r>
-              <a:t>• Реальные КП от поставщиков (если есть)</a:t>
-            </a:r>
-            <a:br/>
-            <a:r>
-              <a:t>• Шаблон вашего договора (если можно)</a:t>
-            </a:r>
-            <a:br/>
-            <a:r>
-              <a:t>• Вопросы, которые возникли после Урока 1</a:t>
+              <a:t>перевод_ТКП</a:t>
+            </a:r>
+          </a:p>
+        </p:txBody>
+      </p:sp>
+      <p:sp>
+        <p:nvSpPr>
+          <p:cNvPr id="11" name="TextBox 10"/>
+          <p:cNvSpPr txBox="1"/>
+          <p:nvPr/>
+        </p:nvSpPr>
+        <p:spPr>
+          <a:xfrm>
+            <a:off x="548640" y="4343400"/>
+            <a:ext cx="5120640" cy="1600200"/>
+          </a:xfrm>
+          <a:prstGeom prst="rect">
+            <a:avLst/>
+          </a:prstGeom>
+          <a:noFill/>
+        </p:spPr>
+        <p:txBody>
+          <a:bodyPr wrap="square">
+            <a:spAutoFit/>
+          </a:bodyPr>
+          <a:lstStyle/>
+          <a:p>
+            <a:pPr>
+              <a:lnSpc>
+                <a:spcPct val="120000"/>
+              </a:lnSpc>
+              <a:defRPr sz="1400">
+                <a:solidFill>
+                  <a:srgbClr val="CBD5E1"/>
+                </a:solidFill>
+                <a:latin typeface="Arial"/>
+              </a:defRPr>
+            </a:pPr>
+            <a:r>
+              <a:t>Загрузка PDF → перевод с сохранением таблиц и терминов → проверка технических деталей.</a:t>
             </a:r>
           </a:p>
         </p:txBody>
@@ -4885,6 +5278,369 @@
         </p:nvSpPr>
         <p:spPr>
           <a:xfrm>
+            <a:off x="457200" y="274320"/>
+            <a:ext cx="11247120" cy="731520"/>
+          </a:xfrm>
+          <a:prstGeom prst="rect">
+            <a:avLst/>
+          </a:prstGeom>
+          <a:noFill/>
+        </p:spPr>
+        <p:txBody>
+          <a:bodyPr wrap="none">
+            <a:spAutoFit/>
+          </a:bodyPr>
+          <a:lstStyle/>
+          <a:p>
+            <a:pPr>
+              <a:defRPr sz="3200" b="1">
+                <a:solidFill>
+                  <a:srgbClr val="00D4FF"/>
+                </a:solidFill>
+                <a:latin typeface="Arial"/>
+              </a:defRPr>
+            </a:pPr>
+            <a:r>
+              <a:t>Домашнее задание</a:t>
+            </a:r>
+          </a:p>
+        </p:txBody>
+      </p:sp>
+      <p:sp>
+        <p:nvSpPr>
+          <p:cNvPr id="3" name="TextBox 2"/>
+          <p:cNvSpPr txBox="1"/>
+          <p:nvPr/>
+        </p:nvSpPr>
+        <p:spPr>
+          <a:xfrm>
+            <a:off x="457200" y="1097280"/>
+            <a:ext cx="11247120" cy="5303520"/>
+          </a:xfrm>
+          <a:prstGeom prst="rect">
+            <a:avLst/>
+          </a:prstGeom>
+          <a:noFill/>
+        </p:spPr>
+        <p:txBody>
+          <a:bodyPr wrap="square">
+            <a:spAutoFit/>
+          </a:bodyPr>
+          <a:lstStyle/>
+          <a:p>
+            <a:pPr>
+              <a:lnSpc>
+                <a:spcPct val="130000"/>
+              </a:lnSpc>
+              <a:spcBef>
+                <a:spcPts val="800"/>
+              </a:spcBef>
+              <a:defRPr sz="1700">
+                <a:solidFill>
+                  <a:srgbClr val="FFFFFF"/>
+                </a:solidFill>
+                <a:latin typeface="Arial"/>
+              </a:defRPr>
+            </a:pPr>
+            <a:r>
+              <a:t>Выберите одну из ваших текущих закупок (металлургическое сырьё, ферросплавы, огнеупоры, электроды):</a:t>
+            </a:r>
+          </a:p>
+          <a:p>
+            <a:pPr>
+              <a:lnSpc>
+                <a:spcPct val="130000"/>
+              </a:lnSpc>
+              <a:spcBef>
+                <a:spcPts val="800"/>
+              </a:spcBef>
+              <a:defRPr sz="1700">
+                <a:solidFill>
+                  <a:srgbClr val="FFFFFF"/>
+                </a:solidFill>
+                <a:latin typeface="Arial"/>
+              </a:defRPr>
+            </a:pPr>
+            <a:r>
+              <a:t>1. Составьте ТЗ с помощью ИИ (используйте РКЗФО)</a:t>
+            </a:r>
+            <a:br/>
+            <a:r>
+              <a:t>2. Проведите Eval (улучшите ТЗ)</a:t>
+            </a:r>
+            <a:br/>
+            <a:r>
+              <a:t>3. Если есть КП от иностранных поставщиков — переведите через GENAi</a:t>
+            </a:r>
+            <a:br/>
+            <a:r>
+              <a:t>4. Если нужно найти поставщиков — попробуйте через ИИ (проверьте реальность!)</a:t>
+            </a:r>
+          </a:p>
+          <a:p>
+            <a:pPr>
+              <a:lnSpc>
+                <a:spcPct val="130000"/>
+              </a:lnSpc>
+              <a:spcBef>
+                <a:spcPts val="800"/>
+              </a:spcBef>
+              <a:defRPr sz="1700">
+                <a:solidFill>
+                  <a:srgbClr val="FFFFFF"/>
+                </a:solidFill>
+                <a:latin typeface="Arial"/>
+              </a:defRPr>
+            </a:pPr>
+            <a:r>
+              <a:t>Формат сдачи:</a:t>
+            </a:r>
+            <a:br/>
+            <a:r>
+              <a:t>• Скриншот диалога с ИИ</a:t>
+            </a:r>
+            <a:br/>
+            <a:r>
+              <a:t>• Итоговый документ (ТЗ, перевод или конкурентный лист)</a:t>
+            </a:r>
+            <a:br/>
+            <a:r>
+              <a:t>• Короткое резюме: 'Что получилось / что не получилось / сколько времени сэкономил'</a:t>
+            </a:r>
+          </a:p>
+          <a:p>
+            <a:pPr>
+              <a:lnSpc>
+                <a:spcPct val="130000"/>
+              </a:lnSpc>
+              <a:spcBef>
+                <a:spcPts val="800"/>
+              </a:spcBef>
+              <a:defRPr sz="1700">
+                <a:solidFill>
+                  <a:srgbClr val="FFFFFF"/>
+                </a:solidFill>
+                <a:latin typeface="Arial"/>
+              </a:defRPr>
+            </a:pPr>
+            <a:r>
+              <a:t>Куда: чат #ai-help или email [внутренний]</a:t>
+            </a:r>
+            <a:br/>
+            <a:r>
+              <a:t>Дедлайн: до Урока 2</a:t>
+            </a:r>
+          </a:p>
+          <a:p>
+            <a:pPr>
+              <a:lnSpc>
+                <a:spcPct val="130000"/>
+              </a:lnSpc>
+              <a:spcBef>
+                <a:spcPts val="800"/>
+              </a:spcBef>
+              <a:defRPr sz="1700">
+                <a:solidFill>
+                  <a:srgbClr val="FFFFFF"/>
+                </a:solidFill>
+                <a:latin typeface="Arial"/>
+              </a:defRPr>
+            </a:pPr>
+            <a:r>
+              <a:t>💡 Совет: Не ждите идеального кейса. Попробуйте на чём угодно — даже на закупке канцелярии. Главное — привычка.</a:t>
+            </a:r>
+          </a:p>
+        </p:txBody>
+      </p:sp>
+    </p:spTree>
+  </p:cSld>
+  <p:clrMapOvr>
+    <a:masterClrMapping/>
+  </p:clrMapOvr>
+</p:sld>
+</file>
+
+<file path=ppt/slides/slide18.xml><?xml version="1.0" encoding="utf-8"?>
+<p:sld xmlns:a="http://schemas.openxmlformats.org/drawingml/2006/main" xmlns:p="http://schemas.openxmlformats.org/presentationml/2006/main" xmlns:r="http://schemas.openxmlformats.org/officeDocument/2006/relationships">
+  <p:cSld>
+    <p:bg>
+      <p:bgPr>
+        <a:solidFill>
+          <a:srgbClr val="0A0A0F"/>
+        </a:solidFill>
+        <a:effectLst/>
+      </p:bgPr>
+    </p:bg>
+    <p:spTree>
+      <p:nvGrpSpPr>
+        <p:cNvPr id="1" name=""/>
+        <p:cNvGrpSpPr/>
+        <p:nvPr/>
+      </p:nvGrpSpPr>
+      <p:grpSpPr/>
+      <p:sp>
+        <p:nvSpPr>
+          <p:cNvPr id="2" name="TextBox 1"/>
+          <p:cNvSpPr txBox="1"/>
+          <p:nvPr/>
+        </p:nvSpPr>
+        <p:spPr>
+          <a:xfrm>
+            <a:off x="457200" y="274320"/>
+            <a:ext cx="11247120" cy="731520"/>
+          </a:xfrm>
+          <a:prstGeom prst="rect">
+            <a:avLst/>
+          </a:prstGeom>
+          <a:noFill/>
+        </p:spPr>
+        <p:txBody>
+          <a:bodyPr wrap="none">
+            <a:spAutoFit/>
+          </a:bodyPr>
+          <a:lstStyle/>
+          <a:p>
+            <a:pPr>
+              <a:defRPr sz="3200" b="1">
+                <a:solidFill>
+                  <a:srgbClr val="00D4FF"/>
+                </a:solidFill>
+                <a:latin typeface="Arial"/>
+              </a:defRPr>
+            </a:pPr>
+            <a:r>
+              <a:t>Что будет в Уроке 2: Анализ и выбор</a:t>
+            </a:r>
+          </a:p>
+        </p:txBody>
+      </p:sp>
+      <p:sp>
+        <p:nvSpPr>
+          <p:cNvPr id="3" name="TextBox 2"/>
+          <p:cNvSpPr txBox="1"/>
+          <p:nvPr/>
+        </p:nvSpPr>
+        <p:spPr>
+          <a:xfrm>
+            <a:off x="457200" y="1097280"/>
+            <a:ext cx="11247120" cy="5303520"/>
+          </a:xfrm>
+          <a:prstGeom prst="rect">
+            <a:avLst/>
+          </a:prstGeom>
+          <a:noFill/>
+        </p:spPr>
+        <p:txBody>
+          <a:bodyPr wrap="square">
+            <a:spAutoFit/>
+          </a:bodyPr>
+          <a:lstStyle/>
+          <a:p>
+            <a:pPr>
+              <a:lnSpc>
+                <a:spcPct val="130000"/>
+              </a:lnSpc>
+              <a:spcBef>
+                <a:spcPts val="800"/>
+              </a:spcBef>
+              <a:defRPr sz="1700">
+                <a:solidFill>
+                  <a:srgbClr val="FFFFFF"/>
+                </a:solidFill>
+                <a:latin typeface="Arial"/>
+              </a:defRPr>
+            </a:pPr>
+            <a:r>
+              <a:t>Следующее занятие:</a:t>
+            </a:r>
+            <a:br/>
+            <a:r>
+              <a:t>• Сравнение ТКП с техническим заданием — соответствуют ли предложения ТЗ?</a:t>
+            </a:r>
+            <a:br/>
+            <a:r>
+              <a:t>• Проверка договоров — риски, неопределённости, отсутствующие условия</a:t>
+            </a:r>
+            <a:br/>
+            <a:r>
+              <a:t>• Red Team анализ — ИИ играет против нас, чтобы найти слабые места</a:t>
+            </a:r>
+            <a:br/>
+            <a:r>
+              <a:t>• TCO (стоимость владения) — считаем не только цену, но и 3-летнюю стоимость</a:t>
+            </a:r>
+            <a:br/>
+            <a:r>
+              <a:t>• Обоснованная рекомендация с цифрами</a:t>
+            </a:r>
+          </a:p>
+          <a:p>
+            <a:pPr>
+              <a:lnSpc>
+                <a:spcPct val="130000"/>
+              </a:lnSpc>
+              <a:spcBef>
+                <a:spcPts val="800"/>
+              </a:spcBef>
+              <a:defRPr sz="1700">
+                <a:solidFill>
+                  <a:srgbClr val="FFFFFF"/>
+                </a:solidFill>
+                <a:latin typeface="Arial"/>
+              </a:defRPr>
+            </a:pPr>
+            <a:r>
+              <a:t>Готовьте:</a:t>
+            </a:r>
+            <a:br/>
+            <a:r>
+              <a:t>• Реальные КП от поставщиков (если есть)</a:t>
+            </a:r>
+            <a:br/>
+            <a:r>
+              <a:t>• Шаблон вашего договора (если можно)</a:t>
+            </a:r>
+            <a:br/>
+            <a:r>
+              <a:t>• Вопросы, которые возникли после Урока 1</a:t>
+            </a:r>
+          </a:p>
+        </p:txBody>
+      </p:sp>
+    </p:spTree>
+  </p:cSld>
+  <p:clrMapOvr>
+    <a:masterClrMapping/>
+  </p:clrMapOvr>
+</p:sld>
+</file>
+
+<file path=ppt/slides/slide19.xml><?xml version="1.0" encoding="utf-8"?>
+<p:sld xmlns:a="http://schemas.openxmlformats.org/drawingml/2006/main" xmlns:p="http://schemas.openxmlformats.org/presentationml/2006/main" xmlns:r="http://schemas.openxmlformats.org/officeDocument/2006/relationships">
+  <p:cSld>
+    <p:bg>
+      <p:bgPr>
+        <a:solidFill>
+          <a:srgbClr val="0A0A0F"/>
+        </a:solidFill>
+        <a:effectLst/>
+      </p:bgPr>
+    </p:bg>
+    <p:spTree>
+      <p:nvGrpSpPr>
+        <p:cNvPr id="1" name=""/>
+        <p:cNvGrpSpPr/>
+        <p:nvPr/>
+      </p:nvGrpSpPr>
+      <p:grpSpPr/>
+      <p:sp>
+        <p:nvSpPr>
+          <p:cNvPr id="2" name="TextBox 1"/>
+          <p:cNvSpPr txBox="1"/>
+          <p:nvPr/>
+        </p:nvSpPr>
+        <p:spPr>
+          <a:xfrm>
             <a:off x="457200" y="1828800"/>
             <a:ext cx="11247120" cy="1097280"/>
           </a:xfrm>
@@ -5001,7 +5757,7 @@
           <a:lstStyle/>
           <a:p>
             <a:pPr>
-              <a:defRPr sz="3600" b="1">
+              <a:defRPr sz="3200" b="1">
                 <a:solidFill>
                   <a:srgbClr val="00D4FF"/>
                 </a:solidFill>
@@ -5009,102 +5765,21 @@
               </a:defRPr>
             </a:pPr>
             <a:r>
-              <a:t>Что вы заберёте с собой</a:t>
-            </a:r>
-          </a:p>
-        </p:txBody>
-      </p:sp>
-      <p:sp>
-        <p:nvSpPr>
-          <p:cNvPr id="3" name="Rectangle 2"/>
-          <p:cNvSpPr/>
-          <p:nvPr/>
-        </p:nvSpPr>
-        <p:spPr>
-          <a:xfrm>
-            <a:off x="457200" y="1371600"/>
-            <a:ext cx="3474720" cy="4572000"/>
-          </a:xfrm>
-          <a:prstGeom prst="rect">
-            <a:avLst/>
-          </a:prstGeom>
-          <a:solidFill>
-            <a:srgbClr val="14141E"/>
-          </a:solidFill>
-          <a:ln>
-            <a:solidFill>
-              <a:srgbClr val="28283C"/>
-            </a:solidFill>
-          </a:ln>
-        </p:spPr>
-        <p:style>
-          <a:lnRef idx="1">
-            <a:schemeClr val="accent1"/>
-          </a:lnRef>
-          <a:fillRef idx="3">
-            <a:schemeClr val="accent1"/>
-          </a:fillRef>
-          <a:effectRef idx="2">
-            <a:schemeClr val="accent1"/>
-          </a:effectRef>
-          <a:fontRef idx="minor">
-            <a:schemeClr val="lt1"/>
-          </a:fontRef>
-        </p:style>
-        <p:txBody>
-          <a:bodyPr rtlCol="0" anchor="ctr"/>
-          <a:lstStyle/>
-          <a:p>
-            <a:pPr algn="ctr"/>
-          </a:p>
-        </p:txBody>
-      </p:sp>
-      <p:sp>
-        <p:nvSpPr>
-          <p:cNvPr id="4" name="TextBox 3"/>
+              <a:t>Наша аудитория</a:t>
+            </a:r>
+          </a:p>
+        </p:txBody>
+      </p:sp>
+      <p:sp>
+        <p:nvSpPr>
+          <p:cNvPr id="3" name="TextBox 2"/>
           <p:cNvSpPr txBox="1"/>
           <p:nvPr/>
         </p:nvSpPr>
         <p:spPr>
           <a:xfrm>
-            <a:off x="548640" y="1645920"/>
-            <a:ext cx="3291840" cy="914400"/>
-          </a:xfrm>
-          <a:prstGeom prst="rect">
-            <a:avLst/>
-          </a:prstGeom>
-          <a:noFill/>
-        </p:spPr>
-        <p:txBody>
-          <a:bodyPr wrap="none">
-            <a:spAutoFit/>
-          </a:bodyPr>
-          <a:lstStyle/>
-          <a:p>
-            <a:pPr algn="ctr">
-              <a:defRPr sz="2800" b="1">
-                <a:solidFill>
-                  <a:srgbClr val="00D4FF"/>
-                </a:solidFill>
-                <a:latin typeface="Arial"/>
-              </a:defRPr>
-            </a:pPr>
-            <a:r>
-              <a:t>ТЗ за 15 мин</a:t>
-            </a:r>
-          </a:p>
-        </p:txBody>
-      </p:sp>
-      <p:sp>
-        <p:nvSpPr>
-          <p:cNvPr id="5" name="TextBox 4"/>
-          <p:cNvSpPr txBox="1"/>
-          <p:nvPr/>
-        </p:nvSpPr>
-        <p:spPr>
-          <a:xfrm>
-            <a:off x="548640" y="2743200"/>
-            <a:ext cx="3291840" cy="2743200"/>
+            <a:off x="457200" y="1097280"/>
+            <a:ext cx="11247120" cy="5303520"/>
           </a:xfrm>
           <a:prstGeom prst="rect">
             <a:avLst/>
@@ -5117,259 +5792,22 @@
           </a:bodyPr>
           <a:lstStyle/>
           <a:p>
-            <a:pPr algn="ctr">
+            <a:pPr>
               <a:lnSpc>
                 <a:spcPct val="130000"/>
               </a:lnSpc>
-              <a:defRPr sz="1600">
-                <a:solidFill>
-                  <a:srgbClr val="CBD5E1"/>
-                </a:solidFill>
-                <a:latin typeface="Arial"/>
-              </a:defRPr>
-            </a:pPr>
-            <a:r>
-              <a:t>Составлять технические задания вместо 2 часов ручной работы. AI генерирует структуру, таблицы, требования — остаётся только проверить.</a:t>
-            </a:r>
-          </a:p>
-        </p:txBody>
-      </p:sp>
-      <p:sp>
-        <p:nvSpPr>
-          <p:cNvPr id="6" name="Rectangle 5"/>
-          <p:cNvSpPr/>
-          <p:nvPr/>
-        </p:nvSpPr>
-        <p:spPr>
-          <a:xfrm>
-            <a:off x="4114800" y="1371600"/>
-            <a:ext cx="3474720" cy="4572000"/>
-          </a:xfrm>
-          <a:prstGeom prst="rect">
-            <a:avLst/>
-          </a:prstGeom>
-          <a:solidFill>
-            <a:srgbClr val="14141E"/>
-          </a:solidFill>
-          <a:ln>
-            <a:solidFill>
-              <a:srgbClr val="28283C"/>
-            </a:solidFill>
-          </a:ln>
-        </p:spPr>
-        <p:style>
-          <a:lnRef idx="1">
-            <a:schemeClr val="accent1"/>
-          </a:lnRef>
-          <a:fillRef idx="3">
-            <a:schemeClr val="accent1"/>
-          </a:fillRef>
-          <a:effectRef idx="2">
-            <a:schemeClr val="accent1"/>
-          </a:effectRef>
-          <a:fontRef idx="minor">
-            <a:schemeClr val="lt1"/>
-          </a:fontRef>
-        </p:style>
-        <p:txBody>
-          <a:bodyPr rtlCol="0" anchor="ctr"/>
-          <a:lstStyle/>
-          <a:p>
-            <a:pPr algn="ctr"/>
-          </a:p>
-        </p:txBody>
-      </p:sp>
-      <p:sp>
-        <p:nvSpPr>
-          <p:cNvPr id="7" name="TextBox 6"/>
-          <p:cNvSpPr txBox="1"/>
-          <p:nvPr/>
-        </p:nvSpPr>
-        <p:spPr>
-          <a:xfrm>
-            <a:off x="4206240" y="1645920"/>
-            <a:ext cx="3291840" cy="914400"/>
-          </a:xfrm>
-          <a:prstGeom prst="rect">
-            <a:avLst/>
-          </a:prstGeom>
-          <a:noFill/>
-        </p:spPr>
-        <p:txBody>
-          <a:bodyPr wrap="none">
-            <a:spAutoFit/>
-          </a:bodyPr>
-          <a:lstStyle/>
-          <a:p>
-            <a:pPr algn="ctr">
-              <a:defRPr sz="2800" b="1">
-                <a:solidFill>
-                  <a:srgbClr val="00D4FF"/>
-                </a:solidFill>
-                <a:latin typeface="Arial"/>
-              </a:defRPr>
-            </a:pPr>
-            <a:r>
-              <a:t>3 КП в таблице</a:t>
-            </a:r>
-          </a:p>
-        </p:txBody>
-      </p:sp>
-      <p:sp>
-        <p:nvSpPr>
-          <p:cNvPr id="8" name="TextBox 7"/>
-          <p:cNvSpPr txBox="1"/>
-          <p:nvPr/>
-        </p:nvSpPr>
-        <p:spPr>
-          <a:xfrm>
-            <a:off x="4206240" y="2743200"/>
-            <a:ext cx="3291840" cy="2743200"/>
-          </a:xfrm>
-          <a:prstGeom prst="rect">
-            <a:avLst/>
-          </a:prstGeom>
-          <a:noFill/>
-        </p:spPr>
-        <p:txBody>
-          <a:bodyPr wrap="square">
-            <a:spAutoFit/>
-          </a:bodyPr>
-          <a:lstStyle/>
-          <a:p>
-            <a:pPr algn="ctr">
-              <a:lnSpc>
-                <a:spcPct val="130000"/>
-              </a:lnSpc>
-              <a:defRPr sz="1600">
-                <a:solidFill>
-                  <a:srgbClr val="CBD5E1"/>
-                </a:solidFill>
-                <a:latin typeface="Arial"/>
-              </a:defRPr>
-            </a:pPr>
-            <a:r>
-              <a:t>Сравнивать коммерческие предложения с рейтингом по критериям. Автоматический расчёт: цена, сроки, гарантия, условия.</a:t>
-            </a:r>
-          </a:p>
-        </p:txBody>
-      </p:sp>
-      <p:sp>
-        <p:nvSpPr>
-          <p:cNvPr id="9" name="Rectangle 8"/>
-          <p:cNvSpPr/>
-          <p:nvPr/>
-        </p:nvSpPr>
-        <p:spPr>
-          <a:xfrm>
-            <a:off x="7772400" y="1371600"/>
-            <a:ext cx="3474720" cy="4572000"/>
-          </a:xfrm>
-          <a:prstGeom prst="rect">
-            <a:avLst/>
-          </a:prstGeom>
-          <a:solidFill>
-            <a:srgbClr val="14141E"/>
-          </a:solidFill>
-          <a:ln>
-            <a:solidFill>
-              <a:srgbClr val="28283C"/>
-            </a:solidFill>
-          </a:ln>
-        </p:spPr>
-        <p:style>
-          <a:lnRef idx="1">
-            <a:schemeClr val="accent1"/>
-          </a:lnRef>
-          <a:fillRef idx="3">
-            <a:schemeClr val="accent1"/>
-          </a:fillRef>
-          <a:effectRef idx="2">
-            <a:schemeClr val="accent1"/>
-          </a:effectRef>
-          <a:fontRef idx="minor">
-            <a:schemeClr val="lt1"/>
-          </a:fontRef>
-        </p:style>
-        <p:txBody>
-          <a:bodyPr rtlCol="0" anchor="ctr"/>
-          <a:lstStyle/>
-          <a:p>
-            <a:pPr algn="ctr"/>
-          </a:p>
-        </p:txBody>
-      </p:sp>
-      <p:sp>
-        <p:nvSpPr>
-          <p:cNvPr id="10" name="TextBox 9"/>
-          <p:cNvSpPr txBox="1"/>
-          <p:nvPr/>
-        </p:nvSpPr>
-        <p:spPr>
-          <a:xfrm>
-            <a:off x="7863840" y="1645920"/>
-            <a:ext cx="3291840" cy="914400"/>
-          </a:xfrm>
-          <a:prstGeom prst="rect">
-            <a:avLst/>
-          </a:prstGeom>
-          <a:noFill/>
-        </p:spPr>
-        <p:txBody>
-          <a:bodyPr wrap="none">
-            <a:spAutoFit/>
-          </a:bodyPr>
-          <a:lstStyle/>
-          <a:p>
-            <a:pPr algn="ctr">
-              <a:defRPr sz="2800" b="1">
-                <a:solidFill>
-                  <a:srgbClr val="00D4FF"/>
-                </a:solidFill>
-                <a:latin typeface="Arial"/>
-              </a:defRPr>
-            </a:pPr>
-            <a:r>
-              <a:t>Перевод ТКП</a:t>
-            </a:r>
-          </a:p>
-        </p:txBody>
-      </p:sp>
-      <p:sp>
-        <p:nvSpPr>
-          <p:cNvPr id="11" name="TextBox 10"/>
-          <p:cNvSpPr txBox="1"/>
-          <p:nvPr/>
-        </p:nvSpPr>
-        <p:spPr>
-          <a:xfrm>
-            <a:off x="7863840" y="2743200"/>
-            <a:ext cx="3291840" cy="2743200"/>
-          </a:xfrm>
-          <a:prstGeom prst="rect">
-            <a:avLst/>
-          </a:prstGeom>
-          <a:noFill/>
-        </p:spPr>
-        <p:txBody>
-          <a:bodyPr wrap="square">
-            <a:spAutoFit/>
-          </a:bodyPr>
-          <a:lstStyle/>
-          <a:p>
-            <a:pPr algn="ctr">
-              <a:lnSpc>
-                <a:spcPct val="130000"/>
-              </a:lnSpc>
-              <a:defRPr sz="1600">
-                <a:solidFill>
-                  <a:srgbClr val="CBD5E1"/>
-                </a:solidFill>
-                <a:latin typeface="Arial"/>
-              </a:defRPr>
-            </a:pPr>
-            <a:r>
-              <a:t>Переводить технико-коммерческие предложения от иностранных поставщиков и вести переписку на английском/китайском.</a:t>
+              <a:spcBef>
+                <a:spcPts val="800"/>
+              </a:spcBef>
+              <a:defRPr sz="1700">
+                <a:solidFill>
+                  <a:srgbClr val="FFFFFF"/>
+                </a:solidFill>
+                <a:latin typeface="Arial"/>
+              </a:defRPr>
+            </a:pPr>
+            <a:r>
+              <a:t>Вы — опытные закупщики и логисты.&lt;br&gt;&lt;br&gt;Вы уже знаете:&lt;br&gt;• Как работает закупочный процесс от ТЗ до договора&lt;br&gt;• Как вести переговоры с поставщиками&lt;br&gt;• Как проверять КП и формировать конкурентные листы&lt;br&gt;• Как контролировать сроки и качество поставок&lt;br&gt;&lt;br&gt;Этот курс не про то, КАК закупать.&lt;br&gt;Этот курс про то, КАК делать это быстрее и точнее с помощью ИИ.&lt;br&gt;&lt;br&gt;Генеративный ИИ — ваш новый инструмент, а не замена.</a:t>
             </a:r>
           </a:p>
         </p:txBody>
@@ -5431,21 +5869,102 @@
               </a:defRPr>
             </a:pPr>
             <a:r>
-              <a:t>Что такое Generative AI? Простая аналогия</a:t>
-            </a:r>
-          </a:p>
-        </p:txBody>
-      </p:sp>
-      <p:sp>
-        <p:nvSpPr>
-          <p:cNvPr id="3" name="TextBox 2"/>
+              <a:t>3 направления ИИ в Русале</a:t>
+            </a:r>
+          </a:p>
+        </p:txBody>
+      </p:sp>
+      <p:sp>
+        <p:nvSpPr>
+          <p:cNvPr id="3" name="Rectangle 2"/>
+          <p:cNvSpPr/>
+          <p:nvPr/>
+        </p:nvSpPr>
+        <p:spPr>
+          <a:xfrm>
+            <a:off x="457200" y="1188720"/>
+            <a:ext cx="5486400" cy="5029200"/>
+          </a:xfrm>
+          <a:prstGeom prst="rect">
+            <a:avLst/>
+          </a:prstGeom>
+          <a:solidFill>
+            <a:srgbClr val="1E0F0F"/>
+          </a:solidFill>
+          <a:ln>
+            <a:solidFill>
+              <a:srgbClr val="EF4444"/>
+            </a:solidFill>
+          </a:ln>
+        </p:spPr>
+        <p:style>
+          <a:lnRef idx="1">
+            <a:schemeClr val="accent1"/>
+          </a:lnRef>
+          <a:fillRef idx="3">
+            <a:schemeClr val="accent1"/>
+          </a:fillRef>
+          <a:effectRef idx="2">
+            <a:schemeClr val="accent1"/>
+          </a:effectRef>
+          <a:fontRef idx="minor">
+            <a:schemeClr val="lt1"/>
+          </a:fontRef>
+        </p:style>
+        <p:txBody>
+          <a:bodyPr rtlCol="0" anchor="ctr"/>
+          <a:lstStyle/>
+          <a:p>
+            <a:pPr algn="ctr"/>
+          </a:p>
+        </p:txBody>
+      </p:sp>
+      <p:sp>
+        <p:nvSpPr>
+          <p:cNvPr id="4" name="TextBox 3"/>
           <p:cNvSpPr txBox="1"/>
           <p:nvPr/>
         </p:nvSpPr>
         <p:spPr>
           <a:xfrm>
-            <a:off x="457200" y="1097280"/>
-            <a:ext cx="11247120" cy="5303520"/>
+            <a:off x="640080" y="1371600"/>
+            <a:ext cx="5120640" cy="548640"/>
+          </a:xfrm>
+          <a:prstGeom prst="rect">
+            <a:avLst/>
+          </a:prstGeom>
+          <a:noFill/>
+        </p:spPr>
+        <p:txBody>
+          <a:bodyPr wrap="none">
+            <a:spAutoFit/>
+          </a:bodyPr>
+          <a:lstStyle/>
+          <a:p>
+            <a:pPr>
+              <a:defRPr sz="2200" b="1">
+                <a:solidFill>
+                  <a:srgbClr val="EF4444"/>
+                </a:solidFill>
+                <a:latin typeface="Arial"/>
+              </a:defRPr>
+            </a:pPr>
+            <a:r>
+              <a:t>CV и ML — для производства</a:t>
+            </a:r>
+          </a:p>
+        </p:txBody>
+      </p:sp>
+      <p:sp>
+        <p:nvSpPr>
+          <p:cNvPr id="5" name="TextBox 4"/>
+          <p:cNvSpPr txBox="1"/>
+          <p:nvPr/>
+        </p:nvSpPr>
+        <p:spPr>
+          <a:xfrm>
+            <a:off x="640080" y="2011680"/>
+            <a:ext cx="5120640" cy="4114800"/>
           </a:xfrm>
           <a:prstGeom prst="rect">
             <a:avLst/>
@@ -5460,51 +5979,257 @@
           <a:p>
             <a:pPr>
               <a:lnSpc>
-                <a:spcPct val="130000"/>
+                <a:spcPct val="120000"/>
               </a:lnSpc>
               <a:spcBef>
-                <a:spcPts val="800"/>
+                <a:spcPts val="600"/>
               </a:spcBef>
-              <a:defRPr sz="1700">
-                <a:solidFill>
-                  <a:srgbClr val="FFFFFF"/>
-                </a:solidFill>
-                <a:latin typeface="Arial"/>
-              </a:defRPr>
-            </a:pPr>
-            <a:r>
-              <a:t>Представьте, что вы задаёте вопрос очень опытному коллеге, который прочитал тысячи документов, участвовал в сотнях закупок и помнит всё. Он отвечает за секунды, не устаёт, не болеет, работает 24/7.</a:t>
+              <a:defRPr sz="1500">
+                <a:solidFill>
+                  <a:srgbClr val="CBD5E1"/>
+                </a:solidFill>
+                <a:latin typeface="Arial"/>
+              </a:defRPr>
+            </a:pPr>
+            <a:r>
+              <a:t>Компьютерное зрение (CV): контроль качества, дефектоскопия</a:t>
             </a:r>
           </a:p>
           <a:p>
             <a:pPr>
               <a:lnSpc>
-                <a:spcPct val="130000"/>
+                <a:spcPct val="120000"/>
               </a:lnSpc>
               <a:spcBef>
-                <a:spcPts val="800"/>
+                <a:spcPts val="600"/>
               </a:spcBef>
-              <a:defRPr sz="1700">
-                <a:solidFill>
-                  <a:srgbClr val="FFFFFF"/>
-                </a:solidFill>
-                <a:latin typeface="Arial"/>
-              </a:defRPr>
-            </a:pPr>
-            <a:r>
-              <a:t>Это НЕ поисковик:</a:t>
-            </a:r>
-            <a:br/>
-            <a:r>
-              <a:t>• Яндекс находит ссылки → вы сами читаете и обобщаете → 10 ссылок = 2 часа работы</a:t>
-            </a:r>
-            <a:br/>
-            <a:r>
-              <a:t>• AI создаёт готовый документ → обобщает за вас → 1 ответ = 2 минуты проверки</a:t>
-            </a:r>
-            <a:br/>
-            <a:r>
-              <a:t>• AI понимает контекст вашей компании, если загрузить документы</a:t>
+              <a:defRPr sz="1500">
+                <a:solidFill>
+                  <a:srgbClr val="CBD5E1"/>
+                </a:solidFill>
+                <a:latin typeface="Arial"/>
+              </a:defRPr>
+            </a:pPr>
+            <a:r>
+              <a:t>Machine Learning: прогнозирование поломок, оптимизация процессов</a:t>
+            </a:r>
+          </a:p>
+          <a:p>
+            <a:pPr>
+              <a:lnSpc>
+                <a:spcPct val="120000"/>
+              </a:lnSpc>
+              <a:spcBef>
+                <a:spcPts val="600"/>
+              </a:spcBef>
+              <a:defRPr sz="1500">
+                <a:solidFill>
+                  <a:srgbClr val="CBD5E1"/>
+                </a:solidFill>
+                <a:latin typeface="Arial"/>
+              </a:defRPr>
+            </a:pPr>
+            <a:r>
+              <a:t>Применение: ремонты, логистика, контроль процесса</a:t>
+            </a:r>
+          </a:p>
+          <a:p>
+            <a:pPr>
+              <a:lnSpc>
+                <a:spcPct val="120000"/>
+              </a:lnSpc>
+              <a:spcBef>
+                <a:spcPts val="600"/>
+              </a:spcBef>
+              <a:defRPr sz="1500">
+                <a:solidFill>
+                  <a:srgbClr val="CBD5E1"/>
+                </a:solidFill>
+                <a:latin typeface="Arial"/>
+              </a:defRPr>
+            </a:pPr>
+            <a:r>
+              <a:t>Результат: предиктивное обслуживание, снижение простоев</a:t>
+            </a:r>
+          </a:p>
+        </p:txBody>
+      </p:sp>
+      <p:sp>
+        <p:nvSpPr>
+          <p:cNvPr id="6" name="Rectangle 5"/>
+          <p:cNvSpPr/>
+          <p:nvPr/>
+        </p:nvSpPr>
+        <p:spPr>
+          <a:xfrm>
+            <a:off x="6217920" y="1188720"/>
+            <a:ext cx="5486400" cy="5029200"/>
+          </a:xfrm>
+          <a:prstGeom prst="rect">
+            <a:avLst/>
+          </a:prstGeom>
+          <a:solidFill>
+            <a:srgbClr val="0F1E14"/>
+          </a:solidFill>
+          <a:ln>
+            <a:solidFill>
+              <a:srgbClr val="10B981"/>
+            </a:solidFill>
+          </a:ln>
+        </p:spPr>
+        <p:style>
+          <a:lnRef idx="1">
+            <a:schemeClr val="accent1"/>
+          </a:lnRef>
+          <a:fillRef idx="3">
+            <a:schemeClr val="accent1"/>
+          </a:fillRef>
+          <a:effectRef idx="2">
+            <a:schemeClr val="accent1"/>
+          </a:effectRef>
+          <a:fontRef idx="minor">
+            <a:schemeClr val="lt1"/>
+          </a:fontRef>
+        </p:style>
+        <p:txBody>
+          <a:bodyPr rtlCol="0" anchor="ctr"/>
+          <a:lstStyle/>
+          <a:p>
+            <a:pPr algn="ctr"/>
+          </a:p>
+        </p:txBody>
+      </p:sp>
+      <p:sp>
+        <p:nvSpPr>
+          <p:cNvPr id="7" name="TextBox 6"/>
+          <p:cNvSpPr txBox="1"/>
+          <p:nvPr/>
+        </p:nvSpPr>
+        <p:spPr>
+          <a:xfrm>
+            <a:off x="6400800" y="1371600"/>
+            <a:ext cx="5120640" cy="548640"/>
+          </a:xfrm>
+          <a:prstGeom prst="rect">
+            <a:avLst/>
+          </a:prstGeom>
+          <a:noFill/>
+        </p:spPr>
+        <p:txBody>
+          <a:bodyPr wrap="none">
+            <a:spAutoFit/>
+          </a:bodyPr>
+          <a:lstStyle/>
+          <a:p>
+            <a:pPr>
+              <a:defRPr sz="2200" b="1">
+                <a:solidFill>
+                  <a:srgbClr val="10B981"/>
+                </a:solidFill>
+                <a:latin typeface="Arial"/>
+              </a:defRPr>
+            </a:pPr>
+            <a:r>
+              <a:t>GENAI — для корпоративных функций</a:t>
+            </a:r>
+          </a:p>
+        </p:txBody>
+      </p:sp>
+      <p:sp>
+        <p:nvSpPr>
+          <p:cNvPr id="8" name="TextBox 7"/>
+          <p:cNvSpPr txBox="1"/>
+          <p:nvPr/>
+        </p:nvSpPr>
+        <p:spPr>
+          <a:xfrm>
+            <a:off x="6400800" y="2011680"/>
+            <a:ext cx="5120640" cy="4114800"/>
+          </a:xfrm>
+          <a:prstGeom prst="rect">
+            <a:avLst/>
+          </a:prstGeom>
+          <a:noFill/>
+        </p:spPr>
+        <p:txBody>
+          <a:bodyPr wrap="square">
+            <a:spAutoFit/>
+          </a:bodyPr>
+          <a:lstStyle/>
+          <a:p>
+            <a:pPr>
+              <a:lnSpc>
+                <a:spcPct val="120000"/>
+              </a:lnSpc>
+              <a:spcBef>
+                <a:spcPts val="600"/>
+              </a:spcBef>
+              <a:defRPr sz="1500">
+                <a:solidFill>
+                  <a:srgbClr val="CBD5E1"/>
+                </a:solidFill>
+                <a:latin typeface="Arial"/>
+              </a:defRPr>
+            </a:pPr>
+            <a:r>
+              <a:t>Генеративный ИИ: создание текстов, анализ документов</a:t>
+            </a:r>
+          </a:p>
+          <a:p>
+            <a:pPr>
+              <a:lnSpc>
+                <a:spcPct val="120000"/>
+              </a:lnSpc>
+              <a:spcBef>
+                <a:spcPts val="600"/>
+              </a:spcBef>
+              <a:defRPr sz="1500">
+                <a:solidFill>
+                  <a:srgbClr val="CBD5E1"/>
+                </a:solidFill>
+                <a:latin typeface="Arial"/>
+              </a:defRPr>
+            </a:pPr>
+            <a:r>
+              <a:t>Применение: закупки, юридический, HR, финансы</a:t>
+            </a:r>
+          </a:p>
+          <a:p>
+            <a:pPr>
+              <a:lnSpc>
+                <a:spcPct val="120000"/>
+              </a:lnSpc>
+              <a:spcBef>
+                <a:spcPts val="600"/>
+              </a:spcBef>
+              <a:defRPr sz="1500">
+                <a:solidFill>
+                  <a:srgbClr val="CBD5E1"/>
+                </a:solidFill>
+                <a:latin typeface="Arial"/>
+              </a:defRPr>
+            </a:pPr>
+            <a:r>
+              <a:t>Результат: автоматизация рутины, анализ рисков</a:t>
+            </a:r>
+          </a:p>
+          <a:p>
+            <a:pPr>
+              <a:lnSpc>
+                <a:spcPct val="120000"/>
+              </a:lnSpc>
+              <a:spcBef>
+                <a:spcPts val="600"/>
+              </a:spcBef>
+              <a:defRPr sz="1500">
+                <a:solidFill>
+                  <a:srgbClr val="CBD5E1"/>
+                </a:solidFill>
+                <a:latin typeface="Arial"/>
+              </a:defRPr>
+            </a:pPr>
+            <a:r>
+              <a:t>Мы говорим про GENAI — три урока именно об этом</a:t>
             </a:r>
           </a:p>
         </p:txBody>
@@ -5558,7 +6283,7 @@
           <a:lstStyle/>
           <a:p>
             <a:pPr>
-              <a:defRPr sz="3200" b="1">
+              <a:defRPr sz="3600" b="1">
                 <a:solidFill>
                   <a:srgbClr val="00D4FF"/>
                 </a:solidFill>
@@ -5566,21 +6291,102 @@
               </a:defRPr>
             </a:pPr>
             <a:r>
-              <a:t>Почему именно GENAi? Безопасность данных</a:t>
-            </a:r>
-          </a:p>
-        </p:txBody>
-      </p:sp>
-      <p:sp>
-        <p:nvSpPr>
-          <p:cNvPr id="3" name="TextBox 2"/>
+              <a:t>Что вы заберёте с собой</a:t>
+            </a:r>
+          </a:p>
+        </p:txBody>
+      </p:sp>
+      <p:sp>
+        <p:nvSpPr>
+          <p:cNvPr id="3" name="Rectangle 2"/>
+          <p:cNvSpPr/>
+          <p:nvPr/>
+        </p:nvSpPr>
+        <p:spPr>
+          <a:xfrm>
+            <a:off x="457200" y="1371600"/>
+            <a:ext cx="3474720" cy="4572000"/>
+          </a:xfrm>
+          <a:prstGeom prst="rect">
+            <a:avLst/>
+          </a:prstGeom>
+          <a:solidFill>
+            <a:srgbClr val="14141E"/>
+          </a:solidFill>
+          <a:ln>
+            <a:solidFill>
+              <a:srgbClr val="28283C"/>
+            </a:solidFill>
+          </a:ln>
+        </p:spPr>
+        <p:style>
+          <a:lnRef idx="1">
+            <a:schemeClr val="accent1"/>
+          </a:lnRef>
+          <a:fillRef idx="3">
+            <a:schemeClr val="accent1"/>
+          </a:fillRef>
+          <a:effectRef idx="2">
+            <a:schemeClr val="accent1"/>
+          </a:effectRef>
+          <a:fontRef idx="minor">
+            <a:schemeClr val="lt1"/>
+          </a:fontRef>
+        </p:style>
+        <p:txBody>
+          <a:bodyPr rtlCol="0" anchor="ctr"/>
+          <a:lstStyle/>
+          <a:p>
+            <a:pPr algn="ctr"/>
+          </a:p>
+        </p:txBody>
+      </p:sp>
+      <p:sp>
+        <p:nvSpPr>
+          <p:cNvPr id="4" name="TextBox 3"/>
           <p:cNvSpPr txBox="1"/>
           <p:nvPr/>
         </p:nvSpPr>
         <p:spPr>
           <a:xfrm>
-            <a:off x="457200" y="1097280"/>
-            <a:ext cx="11247120" cy="5303520"/>
+            <a:off x="548640" y="1645920"/>
+            <a:ext cx="3291840" cy="914400"/>
+          </a:xfrm>
+          <a:prstGeom prst="rect">
+            <a:avLst/>
+          </a:prstGeom>
+          <a:noFill/>
+        </p:spPr>
+        <p:txBody>
+          <a:bodyPr wrap="none">
+            <a:spAutoFit/>
+          </a:bodyPr>
+          <a:lstStyle/>
+          <a:p>
+            <a:pPr algn="ctr">
+              <a:defRPr sz="2800" b="1">
+                <a:solidFill>
+                  <a:srgbClr val="00D4FF"/>
+                </a:solidFill>
+                <a:latin typeface="Arial"/>
+              </a:defRPr>
+            </a:pPr>
+            <a:r>
+              <a:t>ТЗ за 15 мин</a:t>
+            </a:r>
+          </a:p>
+        </p:txBody>
+      </p:sp>
+      <p:sp>
+        <p:nvSpPr>
+          <p:cNvPr id="5" name="TextBox 4"/>
+          <p:cNvSpPr txBox="1"/>
+          <p:nvPr/>
+        </p:nvSpPr>
+        <p:spPr>
+          <a:xfrm>
+            <a:off x="548640" y="2743200"/>
+            <a:ext cx="3291840" cy="2743200"/>
           </a:xfrm>
           <a:prstGeom prst="rect">
             <a:avLst/>
@@ -5593,100 +6399,259 @@
           </a:bodyPr>
           <a:lstStyle/>
           <a:p>
-            <a:pPr>
+            <a:pPr algn="ctr">
               <a:lnSpc>
                 <a:spcPct val="130000"/>
               </a:lnSpc>
-              <a:spcBef>
-                <a:spcPts val="800"/>
-              </a:spcBef>
-              <a:defRPr sz="1700">
-                <a:solidFill>
-                  <a:srgbClr val="FFFFFF"/>
-                </a:solidFill>
-                <a:latin typeface="Arial"/>
-              </a:defRPr>
-            </a:pPr>
-            <a:r>
-              <a:t>Ваши данные НЕ уходят наружу:</a:t>
-            </a:r>
-            <a:br/>
-            <a:r>
-              <a:t>• Не в ChatGPT (OpenAI, США)</a:t>
-            </a:r>
-            <a:br/>
-            <a:r>
-              <a:t>• Не в Яндекс GPT (Яндекс, РФ)</a:t>
-            </a:r>
-            <a:br/>
-            <a:r>
-              <a:t>• Не в Google (Gemini, США)</a:t>
-            </a:r>
-            <a:br/>
-            <a:r>
-              <a:t>• Работаем в закрытом контуре компании</a:t>
-            </a:r>
-            <a:br/>
-            <a:r>
-              <a:t>• Сервер стоит внутри, данные остаются внутри</a:t>
-            </a:r>
-          </a:p>
-          <a:p>
-            <a:pPr>
+              <a:defRPr sz="1600">
+                <a:solidFill>
+                  <a:srgbClr val="CBD5E1"/>
+                </a:solidFill>
+                <a:latin typeface="Arial"/>
+              </a:defRPr>
+            </a:pPr>
+            <a:r>
+              <a:t>Составлять технические задания вместо 2 часов ручной работы. AI генерирует структуру, таблицы, требования — остаётся только проверить.</a:t>
+            </a:r>
+          </a:p>
+        </p:txBody>
+      </p:sp>
+      <p:sp>
+        <p:nvSpPr>
+          <p:cNvPr id="6" name="Rectangle 5"/>
+          <p:cNvSpPr/>
+          <p:nvPr/>
+        </p:nvSpPr>
+        <p:spPr>
+          <a:xfrm>
+            <a:off x="4114800" y="1371600"/>
+            <a:ext cx="3474720" cy="4572000"/>
+          </a:xfrm>
+          <a:prstGeom prst="rect">
+            <a:avLst/>
+          </a:prstGeom>
+          <a:solidFill>
+            <a:srgbClr val="14141E"/>
+          </a:solidFill>
+          <a:ln>
+            <a:solidFill>
+              <a:srgbClr val="28283C"/>
+            </a:solidFill>
+          </a:ln>
+        </p:spPr>
+        <p:style>
+          <a:lnRef idx="1">
+            <a:schemeClr val="accent1"/>
+          </a:lnRef>
+          <a:fillRef idx="3">
+            <a:schemeClr val="accent1"/>
+          </a:fillRef>
+          <a:effectRef idx="2">
+            <a:schemeClr val="accent1"/>
+          </a:effectRef>
+          <a:fontRef idx="minor">
+            <a:schemeClr val="lt1"/>
+          </a:fontRef>
+        </p:style>
+        <p:txBody>
+          <a:bodyPr rtlCol="0" anchor="ctr"/>
+          <a:lstStyle/>
+          <a:p>
+            <a:pPr algn="ctr"/>
+          </a:p>
+        </p:txBody>
+      </p:sp>
+      <p:sp>
+        <p:nvSpPr>
+          <p:cNvPr id="7" name="TextBox 6"/>
+          <p:cNvSpPr txBox="1"/>
+          <p:nvPr/>
+        </p:nvSpPr>
+        <p:spPr>
+          <a:xfrm>
+            <a:off x="4206240" y="1645920"/>
+            <a:ext cx="3291840" cy="914400"/>
+          </a:xfrm>
+          <a:prstGeom prst="rect">
+            <a:avLst/>
+          </a:prstGeom>
+          <a:noFill/>
+        </p:spPr>
+        <p:txBody>
+          <a:bodyPr wrap="none">
+            <a:spAutoFit/>
+          </a:bodyPr>
+          <a:lstStyle/>
+          <a:p>
+            <a:pPr algn="ctr">
+              <a:defRPr sz="2800" b="1">
+                <a:solidFill>
+                  <a:srgbClr val="00D4FF"/>
+                </a:solidFill>
+                <a:latin typeface="Arial"/>
+              </a:defRPr>
+            </a:pPr>
+            <a:r>
+              <a:t>3 КП в таблице</a:t>
+            </a:r>
+          </a:p>
+        </p:txBody>
+      </p:sp>
+      <p:sp>
+        <p:nvSpPr>
+          <p:cNvPr id="8" name="TextBox 7"/>
+          <p:cNvSpPr txBox="1"/>
+          <p:nvPr/>
+        </p:nvSpPr>
+        <p:spPr>
+          <a:xfrm>
+            <a:off x="4206240" y="2743200"/>
+            <a:ext cx="3291840" cy="2743200"/>
+          </a:xfrm>
+          <a:prstGeom prst="rect">
+            <a:avLst/>
+          </a:prstGeom>
+          <a:noFill/>
+        </p:spPr>
+        <p:txBody>
+          <a:bodyPr wrap="square">
+            <a:spAutoFit/>
+          </a:bodyPr>
+          <a:lstStyle/>
+          <a:p>
+            <a:pPr algn="ctr">
               <a:lnSpc>
                 <a:spcPct val="130000"/>
               </a:lnSpc>
-              <a:spcBef>
-                <a:spcPts val="800"/>
-              </a:spcBef>
-              <a:defRPr sz="1700">
-                <a:solidFill>
-                  <a:srgbClr val="FFFFFF"/>
-                </a:solidFill>
-                <a:latin typeface="Arial"/>
-              </a:defRPr>
-            </a:pPr>
-            <a:r>
-              <a:t>Что можно загружать без опасений:</a:t>
-            </a:r>
-            <a:br/>
-            <a:r>
-              <a:t>• Внутренние регламенты закупок</a:t>
-            </a:r>
-            <a:br/>
-            <a:r>
-              <a:t>• Коммерческие предложения с реальными ценами</a:t>
-            </a:r>
-            <a:br/>
-            <a:r>
-              <a:t>• Договоры и приложения</a:t>
-            </a:r>
-            <a:br/>
-            <a:r>
-              <a:t>• Прайс-листы и технические задания</a:t>
-            </a:r>
-            <a:br/>
-            <a:r>
-              <a:t>• Переписка с поставщиками (в том числе конфиденциальная)</a:t>
-            </a:r>
-          </a:p>
-          <a:p>
-            <a:pPr>
+              <a:defRPr sz="1600">
+                <a:solidFill>
+                  <a:srgbClr val="CBD5E1"/>
+                </a:solidFill>
+                <a:latin typeface="Arial"/>
+              </a:defRPr>
+            </a:pPr>
+            <a:r>
+              <a:t>Сравнивать коммерческие предложения с рейтингом по критериям. Автоматический расчёт: цена, сроки, гарантия, условия.</a:t>
+            </a:r>
+          </a:p>
+        </p:txBody>
+      </p:sp>
+      <p:sp>
+        <p:nvSpPr>
+          <p:cNvPr id="9" name="Rectangle 8"/>
+          <p:cNvSpPr/>
+          <p:nvPr/>
+        </p:nvSpPr>
+        <p:spPr>
+          <a:xfrm>
+            <a:off x="7772400" y="1371600"/>
+            <a:ext cx="3474720" cy="4572000"/>
+          </a:xfrm>
+          <a:prstGeom prst="rect">
+            <a:avLst/>
+          </a:prstGeom>
+          <a:solidFill>
+            <a:srgbClr val="14141E"/>
+          </a:solidFill>
+          <a:ln>
+            <a:solidFill>
+              <a:srgbClr val="28283C"/>
+            </a:solidFill>
+          </a:ln>
+        </p:spPr>
+        <p:style>
+          <a:lnRef idx="1">
+            <a:schemeClr val="accent1"/>
+          </a:lnRef>
+          <a:fillRef idx="3">
+            <a:schemeClr val="accent1"/>
+          </a:fillRef>
+          <a:effectRef idx="2">
+            <a:schemeClr val="accent1"/>
+          </a:effectRef>
+          <a:fontRef idx="minor">
+            <a:schemeClr val="lt1"/>
+          </a:fontRef>
+        </p:style>
+        <p:txBody>
+          <a:bodyPr rtlCol="0" anchor="ctr"/>
+          <a:lstStyle/>
+          <a:p>
+            <a:pPr algn="ctr"/>
+          </a:p>
+        </p:txBody>
+      </p:sp>
+      <p:sp>
+        <p:nvSpPr>
+          <p:cNvPr id="10" name="TextBox 9"/>
+          <p:cNvSpPr txBox="1"/>
+          <p:nvPr/>
+        </p:nvSpPr>
+        <p:spPr>
+          <a:xfrm>
+            <a:off x="7863840" y="1645920"/>
+            <a:ext cx="3291840" cy="914400"/>
+          </a:xfrm>
+          <a:prstGeom prst="rect">
+            <a:avLst/>
+          </a:prstGeom>
+          <a:noFill/>
+        </p:spPr>
+        <p:txBody>
+          <a:bodyPr wrap="none">
+            <a:spAutoFit/>
+          </a:bodyPr>
+          <a:lstStyle/>
+          <a:p>
+            <a:pPr algn="ctr">
+              <a:defRPr sz="2800" b="1">
+                <a:solidFill>
+                  <a:srgbClr val="00D4FF"/>
+                </a:solidFill>
+                <a:latin typeface="Arial"/>
+              </a:defRPr>
+            </a:pPr>
+            <a:r>
+              <a:t>Перевод ТКП</a:t>
+            </a:r>
+          </a:p>
+        </p:txBody>
+      </p:sp>
+      <p:sp>
+        <p:nvSpPr>
+          <p:cNvPr id="11" name="TextBox 10"/>
+          <p:cNvSpPr txBox="1"/>
+          <p:nvPr/>
+        </p:nvSpPr>
+        <p:spPr>
+          <a:xfrm>
+            <a:off x="7863840" y="2743200"/>
+            <a:ext cx="3291840" cy="2743200"/>
+          </a:xfrm>
+          <a:prstGeom prst="rect">
+            <a:avLst/>
+          </a:prstGeom>
+          <a:noFill/>
+        </p:spPr>
+        <p:txBody>
+          <a:bodyPr wrap="square">
+            <a:spAutoFit/>
+          </a:bodyPr>
+          <a:lstStyle/>
+          <a:p>
+            <a:pPr algn="ctr">
               <a:lnSpc>
                 <a:spcPct val="130000"/>
               </a:lnSpc>
-              <a:spcBef>
-                <a:spcPts val="800"/>
-              </a:spcBef>
-              <a:defRPr sz="1700">
-                <a:solidFill>
-                  <a:srgbClr val="FFFFFF"/>
-                </a:solidFill>
-                <a:latin typeface="Arial"/>
-              </a:defRPr>
-            </a:pPr>
-            <a:r>
-              <a:t>Схема: Ваш компьютер → Внутренний сервер GENAi → Ответ (никуда больше не идёт)</a:t>
+              <a:defRPr sz="1600">
+                <a:solidFill>
+                  <a:srgbClr val="CBD5E1"/>
+                </a:solidFill>
+                <a:latin typeface="Arial"/>
+              </a:defRPr>
+            </a:pPr>
+            <a:r>
+              <a:t>Переводить технико-коммерческие предложения от иностранных поставщиков и вести переписку на английском/китайском.</a:t>
             </a:r>
           </a:p>
         </p:txBody>
@@ -5748,102 +6713,21 @@
               </a:defRPr>
             </a:pPr>
             <a:r>
-              <a:t>Интерфейс GENAi — 5 главных элементов</a:t>
-            </a:r>
-          </a:p>
-        </p:txBody>
-      </p:sp>
-      <p:sp>
-        <p:nvSpPr>
-          <p:cNvPr id="3" name="Rectangle 2"/>
-          <p:cNvSpPr/>
-          <p:nvPr/>
-        </p:nvSpPr>
-        <p:spPr>
-          <a:xfrm>
-            <a:off x="457200" y="1188720"/>
-            <a:ext cx="3474720" cy="2331720"/>
-          </a:xfrm>
-          <a:prstGeom prst="rect">
-            <a:avLst/>
-          </a:prstGeom>
-          <a:solidFill>
-            <a:srgbClr val="14141E"/>
-          </a:solidFill>
-          <a:ln>
-            <a:solidFill>
-              <a:srgbClr val="28283C"/>
-            </a:solidFill>
-          </a:ln>
-        </p:spPr>
-        <p:style>
-          <a:lnRef idx="1">
-            <a:schemeClr val="accent1"/>
-          </a:lnRef>
-          <a:fillRef idx="3">
-            <a:schemeClr val="accent1"/>
-          </a:fillRef>
-          <a:effectRef idx="2">
-            <a:schemeClr val="accent1"/>
-          </a:effectRef>
-          <a:fontRef idx="minor">
-            <a:schemeClr val="lt1"/>
-          </a:fontRef>
-        </p:style>
-        <p:txBody>
-          <a:bodyPr rtlCol="0" anchor="ctr"/>
-          <a:lstStyle/>
-          <a:p>
-            <a:pPr algn="ctr"/>
-          </a:p>
-        </p:txBody>
-      </p:sp>
-      <p:sp>
-        <p:nvSpPr>
-          <p:cNvPr id="4" name="TextBox 3"/>
+              <a:t>Что такое Generative AI? Простая аналогия</a:t>
+            </a:r>
+          </a:p>
+        </p:txBody>
+      </p:sp>
+      <p:sp>
+        <p:nvSpPr>
+          <p:cNvPr id="3" name="TextBox 2"/>
           <p:cNvSpPr txBox="1"/>
           <p:nvPr/>
         </p:nvSpPr>
         <p:spPr>
           <a:xfrm>
-            <a:off x="548640" y="1325880"/>
-            <a:ext cx="3291840" cy="457200"/>
-          </a:xfrm>
-          <a:prstGeom prst="rect">
-            <a:avLst/>
-          </a:prstGeom>
-          <a:noFill/>
-        </p:spPr>
-        <p:txBody>
-          <a:bodyPr wrap="none">
-            <a:spAutoFit/>
-          </a:bodyPr>
-          <a:lstStyle/>
-          <a:p>
-            <a:pPr>
-              <a:defRPr sz="1800" b="1">
-                <a:solidFill>
-                  <a:srgbClr val="FFFFFF"/>
-                </a:solidFill>
-                <a:latin typeface="Arial"/>
-              </a:defRPr>
-            </a:pPr>
-            <a:r>
-              <a:t>Новый чат (+)</a:t>
-            </a:r>
-          </a:p>
-        </p:txBody>
-      </p:sp>
-      <p:sp>
-        <p:nvSpPr>
-          <p:cNvPr id="5" name="TextBox 4"/>
-          <p:cNvSpPr txBox="1"/>
-          <p:nvPr/>
-        </p:nvSpPr>
-        <p:spPr>
-          <a:xfrm>
-            <a:off x="548640" y="1828800"/>
-            <a:ext cx="3291840" cy="1600200"/>
+            <a:off x="457200" y="1097280"/>
+            <a:ext cx="11247120" cy="5303520"/>
           </a:xfrm>
           <a:prstGeom prst="rect">
             <a:avLst/>
@@ -5858,90 +6742,12 @@
           <a:p>
             <a:pPr>
               <a:lnSpc>
-                <a:spcPct val="120000"/>
+                <a:spcPct val="130000"/>
               </a:lnSpc>
-              <a:defRPr sz="1400">
-                <a:solidFill>
-                  <a:srgbClr val="CBD5E1"/>
-                </a:solidFill>
-                <a:latin typeface="Arial"/>
-              </a:defRPr>
-            </a:pPr>
-            <a:r>
-              <a:t>Начать новый разговор. Старые чаты сохраняются в истории слева. Можно вернуться к любому диалогу.</a:t>
-            </a:r>
-          </a:p>
-        </p:txBody>
-      </p:sp>
-      <p:sp>
-        <p:nvSpPr>
-          <p:cNvPr id="6" name="Rectangle 5"/>
-          <p:cNvSpPr/>
-          <p:nvPr/>
-        </p:nvSpPr>
-        <p:spPr>
-          <a:xfrm>
-            <a:off x="4114800" y="1188720"/>
-            <a:ext cx="3474720" cy="2331720"/>
-          </a:xfrm>
-          <a:prstGeom prst="rect">
-            <a:avLst/>
-          </a:prstGeom>
-          <a:solidFill>
-            <a:srgbClr val="14141E"/>
-          </a:solidFill>
-          <a:ln>
-            <a:solidFill>
-              <a:srgbClr val="28283C"/>
-            </a:solidFill>
-          </a:ln>
-        </p:spPr>
-        <p:style>
-          <a:lnRef idx="1">
-            <a:schemeClr val="accent1"/>
-          </a:lnRef>
-          <a:fillRef idx="3">
-            <a:schemeClr val="accent1"/>
-          </a:fillRef>
-          <a:effectRef idx="2">
-            <a:schemeClr val="accent1"/>
-          </a:effectRef>
-          <a:fontRef idx="minor">
-            <a:schemeClr val="lt1"/>
-          </a:fontRef>
-        </p:style>
-        <p:txBody>
-          <a:bodyPr rtlCol="0" anchor="ctr"/>
-          <a:lstStyle/>
-          <a:p>
-            <a:pPr algn="ctr"/>
-          </a:p>
-        </p:txBody>
-      </p:sp>
-      <p:sp>
-        <p:nvSpPr>
-          <p:cNvPr id="7" name="TextBox 6"/>
-          <p:cNvSpPr txBox="1"/>
-          <p:nvPr/>
-        </p:nvSpPr>
-        <p:spPr>
-          <a:xfrm>
-            <a:off x="4206240" y="1325880"/>
-            <a:ext cx="3291840" cy="457200"/>
-          </a:xfrm>
-          <a:prstGeom prst="rect">
-            <a:avLst/>
-          </a:prstGeom>
-          <a:noFill/>
-        </p:spPr>
-        <p:txBody>
-          <a:bodyPr wrap="none">
-            <a:spAutoFit/>
-          </a:bodyPr>
-          <a:lstStyle/>
-          <a:p>
-            <a:pPr>
-              <a:defRPr sz="1800" b="1">
+              <a:spcBef>
+                <a:spcPts val="800"/>
+              </a:spcBef>
+              <a:defRPr sz="1700">
                 <a:solidFill>
                   <a:srgbClr val="FFFFFF"/>
                 </a:solidFill>
@@ -5949,119 +6755,18 @@
               </a:defRPr>
             </a:pPr>
             <a:r>
-              <a:t>Скрепка 📎</a:t>
-            </a:r>
-          </a:p>
-        </p:txBody>
-      </p:sp>
-      <p:sp>
-        <p:nvSpPr>
-          <p:cNvPr id="8" name="TextBox 7"/>
-          <p:cNvSpPr txBox="1"/>
-          <p:nvPr/>
-        </p:nvSpPr>
-        <p:spPr>
-          <a:xfrm>
-            <a:off x="4206240" y="1828800"/>
-            <a:ext cx="3291840" cy="1600200"/>
-          </a:xfrm>
-          <a:prstGeom prst="rect">
-            <a:avLst/>
-          </a:prstGeom>
-          <a:noFill/>
-        </p:spPr>
-        <p:txBody>
-          <a:bodyPr wrap="square">
-            <a:spAutoFit/>
-          </a:bodyPr>
-          <a:lstStyle/>
+              <a:t>Представьте, что вы задаёте вопрос очень опытному коллеге, который прочитал тысячи документов, участвовал в сотнях закупок и помнит всё. Он отвечает за секунды, не устаёт, не болеет, работает 24/7.</a:t>
+            </a:r>
+          </a:p>
           <a:p>
             <a:pPr>
               <a:lnSpc>
-                <a:spcPct val="120000"/>
+                <a:spcPct val="130000"/>
               </a:lnSpc>
-              <a:defRPr sz="1400">
-                <a:solidFill>
-                  <a:srgbClr val="CBD5E1"/>
-                </a:solidFill>
-                <a:latin typeface="Arial"/>
-              </a:defRPr>
-            </a:pPr>
-            <a:r>
-              <a:t>Прикрепить файл: PDF (ТЗ, КП, договор), Word, Excel. AI проанализирует содержимое и ответит по документу.</a:t>
-            </a:r>
-          </a:p>
-        </p:txBody>
-      </p:sp>
-      <p:sp>
-        <p:nvSpPr>
-          <p:cNvPr id="9" name="Rectangle 8"/>
-          <p:cNvSpPr/>
-          <p:nvPr/>
-        </p:nvSpPr>
-        <p:spPr>
-          <a:xfrm>
-            <a:off x="7772400" y="1188720"/>
-            <a:ext cx="3474720" cy="2331720"/>
-          </a:xfrm>
-          <a:prstGeom prst="rect">
-            <a:avLst/>
-          </a:prstGeom>
-          <a:solidFill>
-            <a:srgbClr val="14141E"/>
-          </a:solidFill>
-          <a:ln>
-            <a:solidFill>
-              <a:srgbClr val="28283C"/>
-            </a:solidFill>
-          </a:ln>
-        </p:spPr>
-        <p:style>
-          <a:lnRef idx="1">
-            <a:schemeClr val="accent1"/>
-          </a:lnRef>
-          <a:fillRef idx="3">
-            <a:schemeClr val="accent1"/>
-          </a:fillRef>
-          <a:effectRef idx="2">
-            <a:schemeClr val="accent1"/>
-          </a:effectRef>
-          <a:fontRef idx="minor">
-            <a:schemeClr val="lt1"/>
-          </a:fontRef>
-        </p:style>
-        <p:txBody>
-          <a:bodyPr rtlCol="0" anchor="ctr"/>
-          <a:lstStyle/>
-          <a:p>
-            <a:pPr algn="ctr"/>
-          </a:p>
-        </p:txBody>
-      </p:sp>
-      <p:sp>
-        <p:nvSpPr>
-          <p:cNvPr id="10" name="TextBox 9"/>
-          <p:cNvSpPr txBox="1"/>
-          <p:nvPr/>
-        </p:nvSpPr>
-        <p:spPr>
-          <a:xfrm>
-            <a:off x="7863840" y="1325880"/>
-            <a:ext cx="3291840" cy="457200"/>
-          </a:xfrm>
-          <a:prstGeom prst="rect">
-            <a:avLst/>
-          </a:prstGeom>
-          <a:noFill/>
-        </p:spPr>
-        <p:txBody>
-          <a:bodyPr wrap="none">
-            <a:spAutoFit/>
-          </a:bodyPr>
-          <a:lstStyle/>
-          <a:p>
-            <a:pPr>
-              <a:defRPr sz="1800" b="1">
+              <a:spcBef>
+                <a:spcPts val="800"/>
+              </a:spcBef>
+              <a:defRPr sz="1700">
                 <a:solidFill>
                   <a:srgbClr val="FFFFFF"/>
                 </a:solidFill>
@@ -6069,286 +6774,19 @@
               </a:defRPr>
             </a:pPr>
             <a:r>
-              <a:t>Выбор модели</a:t>
-            </a:r>
-          </a:p>
-        </p:txBody>
-      </p:sp>
-      <p:sp>
-        <p:nvSpPr>
-          <p:cNvPr id="11" name="TextBox 10"/>
-          <p:cNvSpPr txBox="1"/>
-          <p:nvPr/>
-        </p:nvSpPr>
-        <p:spPr>
-          <a:xfrm>
-            <a:off x="7863840" y="1828800"/>
-            <a:ext cx="3291840" cy="1600200"/>
-          </a:xfrm>
-          <a:prstGeom prst="rect">
-            <a:avLst/>
-          </a:prstGeom>
-          <a:noFill/>
-        </p:spPr>
-        <p:txBody>
-          <a:bodyPr wrap="square">
-            <a:spAutoFit/>
-          </a:bodyPr>
-          <a:lstStyle/>
-          <a:p>
-            <a:pPr>
-              <a:lnSpc>
-                <a:spcPct val="120000"/>
-              </a:lnSpc>
-              <a:defRPr sz="1400">
-                <a:solidFill>
-                  <a:srgbClr val="CBD5E1"/>
-                </a:solidFill>
-                <a:latin typeface="Arial"/>
-              </a:defRPr>
-            </a:pPr>
-            <a:r>
-              <a:t>Llama 3 / Mistral — для текстов и анализа. Qwen — если работаете с китайскими поставщиками. Переключайте под задачу.</a:t>
-            </a:r>
-          </a:p>
-        </p:txBody>
-      </p:sp>
-      <p:sp>
-        <p:nvSpPr>
-          <p:cNvPr id="12" name="Rectangle 11"/>
-          <p:cNvSpPr/>
-          <p:nvPr/>
-        </p:nvSpPr>
-        <p:spPr>
-          <a:xfrm>
-            <a:off x="457200" y="3703320"/>
-            <a:ext cx="3474720" cy="2331720"/>
-          </a:xfrm>
-          <a:prstGeom prst="rect">
-            <a:avLst/>
-          </a:prstGeom>
-          <a:solidFill>
-            <a:srgbClr val="14141E"/>
-          </a:solidFill>
-          <a:ln>
-            <a:solidFill>
-              <a:srgbClr val="28283C"/>
-            </a:solidFill>
-          </a:ln>
-        </p:spPr>
-        <p:style>
-          <a:lnRef idx="1">
-            <a:schemeClr val="accent1"/>
-          </a:lnRef>
-          <a:fillRef idx="3">
-            <a:schemeClr val="accent1"/>
-          </a:fillRef>
-          <a:effectRef idx="2">
-            <a:schemeClr val="accent1"/>
-          </a:effectRef>
-          <a:fontRef idx="minor">
-            <a:schemeClr val="lt1"/>
-          </a:fontRef>
-        </p:style>
-        <p:txBody>
-          <a:bodyPr rtlCol="0" anchor="ctr"/>
-          <a:lstStyle/>
-          <a:p>
-            <a:pPr algn="ctr"/>
-          </a:p>
-        </p:txBody>
-      </p:sp>
-      <p:sp>
-        <p:nvSpPr>
-          <p:cNvPr id="13" name="TextBox 12"/>
-          <p:cNvSpPr txBox="1"/>
-          <p:nvPr/>
-        </p:nvSpPr>
-        <p:spPr>
-          <a:xfrm>
-            <a:off x="548640" y="3840480"/>
-            <a:ext cx="3291840" cy="457200"/>
-          </a:xfrm>
-          <a:prstGeom prst="rect">
-            <a:avLst/>
-          </a:prstGeom>
-          <a:noFill/>
-        </p:spPr>
-        <p:txBody>
-          <a:bodyPr wrap="none">
-            <a:spAutoFit/>
-          </a:bodyPr>
-          <a:lstStyle/>
-          <a:p>
-            <a:pPr>
-              <a:defRPr sz="1800" b="1">
-                <a:solidFill>
-                  <a:srgbClr val="FFFFFF"/>
-                </a:solidFill>
-                <a:latin typeface="Arial"/>
-              </a:defRPr>
-            </a:pPr>
-            <a:r>
-              <a:t>Настройки ⚙️</a:t>
-            </a:r>
-          </a:p>
-        </p:txBody>
-      </p:sp>
-      <p:sp>
-        <p:nvSpPr>
-          <p:cNvPr id="14" name="TextBox 13"/>
-          <p:cNvSpPr txBox="1"/>
-          <p:nvPr/>
-        </p:nvSpPr>
-        <p:spPr>
-          <a:xfrm>
-            <a:off x="548640" y="4343400"/>
-            <a:ext cx="3291840" cy="1600200"/>
-          </a:xfrm>
-          <a:prstGeom prst="rect">
-            <a:avLst/>
-          </a:prstGeom>
-          <a:noFill/>
-        </p:spPr>
-        <p:txBody>
-          <a:bodyPr wrap="square">
-            <a:spAutoFit/>
-          </a:bodyPr>
-          <a:lstStyle/>
-          <a:p>
-            <a:pPr>
-              <a:lnSpc>
-                <a:spcPct val="120000"/>
-              </a:lnSpc>
-              <a:defRPr sz="1400">
-                <a:solidFill>
-                  <a:srgbClr val="CBD5E1"/>
-                </a:solidFill>
-                <a:latin typeface="Arial"/>
-              </a:defRPr>
-            </a:pPr>
-            <a:r>
-              <a:t>System Prompt — настройка ассистента под ваш стиль. Temperature — строгость ответов (0.1 для документов, 0.7 для идей).</a:t>
-            </a:r>
-          </a:p>
-        </p:txBody>
-      </p:sp>
-      <p:sp>
-        <p:nvSpPr>
-          <p:cNvPr id="15" name="Rectangle 14"/>
-          <p:cNvSpPr/>
-          <p:nvPr/>
-        </p:nvSpPr>
-        <p:spPr>
-          <a:xfrm>
-            <a:off x="4114800" y="3703320"/>
-            <a:ext cx="3474720" cy="2331720"/>
-          </a:xfrm>
-          <a:prstGeom prst="rect">
-            <a:avLst/>
-          </a:prstGeom>
-          <a:solidFill>
-            <a:srgbClr val="14141E"/>
-          </a:solidFill>
-          <a:ln>
-            <a:solidFill>
-              <a:srgbClr val="28283C"/>
-            </a:solidFill>
-          </a:ln>
-        </p:spPr>
-        <p:style>
-          <a:lnRef idx="1">
-            <a:schemeClr val="accent1"/>
-          </a:lnRef>
-          <a:fillRef idx="3">
-            <a:schemeClr val="accent1"/>
-          </a:fillRef>
-          <a:effectRef idx="2">
-            <a:schemeClr val="accent1"/>
-          </a:effectRef>
-          <a:fontRef idx="minor">
-            <a:schemeClr val="lt1"/>
-          </a:fontRef>
-        </p:style>
-        <p:txBody>
-          <a:bodyPr rtlCol="0" anchor="ctr"/>
-          <a:lstStyle/>
-          <a:p>
-            <a:pPr algn="ctr"/>
-          </a:p>
-        </p:txBody>
-      </p:sp>
-      <p:sp>
-        <p:nvSpPr>
-          <p:cNvPr id="16" name="TextBox 15"/>
-          <p:cNvSpPr txBox="1"/>
-          <p:nvPr/>
-        </p:nvSpPr>
-        <p:spPr>
-          <a:xfrm>
-            <a:off x="4206240" y="3840480"/>
-            <a:ext cx="3291840" cy="457200"/>
-          </a:xfrm>
-          <a:prstGeom prst="rect">
-            <a:avLst/>
-          </a:prstGeom>
-          <a:noFill/>
-        </p:spPr>
-        <p:txBody>
-          <a:bodyPr wrap="none">
-            <a:spAutoFit/>
-          </a:bodyPr>
-          <a:lstStyle/>
-          <a:p>
-            <a:pPr>
-              <a:defRPr sz="1800" b="1">
-                <a:solidFill>
-                  <a:srgbClr val="FFFFFF"/>
-                </a:solidFill>
-                <a:latin typeface="Arial"/>
-              </a:defRPr>
-            </a:pPr>
-            <a:r>
-              <a:t>Шаблоны</a:t>
-            </a:r>
-          </a:p>
-        </p:txBody>
-      </p:sp>
-      <p:sp>
-        <p:nvSpPr>
-          <p:cNvPr id="17" name="TextBox 16"/>
-          <p:cNvSpPr txBox="1"/>
-          <p:nvPr/>
-        </p:nvSpPr>
-        <p:spPr>
-          <a:xfrm>
-            <a:off x="4206240" y="4343400"/>
-            <a:ext cx="3291840" cy="1600200"/>
-          </a:xfrm>
-          <a:prstGeom prst="rect">
-            <a:avLst/>
-          </a:prstGeom>
-          <a:noFill/>
-        </p:spPr>
-        <p:txBody>
-          <a:bodyPr wrap="square">
-            <a:spAutoFit/>
-          </a:bodyPr>
-          <a:lstStyle/>
-          <a:p>
-            <a:pPr>
-              <a:lnSpc>
-                <a:spcPct val="120000"/>
-              </a:lnSpc>
-              <a:defRPr sz="1400">
-                <a:solidFill>
-                  <a:srgbClr val="CBD5E1"/>
-                </a:solidFill>
-                <a:latin typeface="Arial"/>
-              </a:defRPr>
-            </a:pPr>
-            <a:r>
-              <a:t>Сохраняйте частые запросы. В GENAi можно создавать собственные шаблоны промптов для повторяющихся задач.</a:t>
+              <a:t>Это НЕ поисковик:</a:t>
+            </a:r>
+            <a:br/>
+            <a:r>
+              <a:t>• Яндекс находит ссылки → вы сами читаете и обобщаете → 10 ссылок = 2 часа работы</a:t>
+            </a:r>
+            <a:br/>
+            <a:r>
+              <a:t>• AI создаёт готовый документ → обобщает за вас → 1 ответ = 2 минуты проверки</a:t>
+            </a:r>
+            <a:br/>
+            <a:r>
+              <a:t>• AI понимает контекст вашей компании, если загрузить документы</a:t>
             </a:r>
           </a:p>
         </p:txBody>
@@ -6410,7 +6848,7 @@
               </a:defRPr>
             </a:pPr>
             <a:r>
-              <a:t>Формула РКЗФО — говорите с ИИ на одном языке</a:t>
+              <a:t>Почему именно GENAi? Безопасность данных</a:t>
             </a:r>
           </a:p>
         </p:txBody>
@@ -6452,23 +6890,27 @@
               </a:defRPr>
             </a:pPr>
             <a:r>
-              <a:t>Проблема: 'Проверь договор' = плохой запрос. Почему? ИИ не знает:</a:t>
+              <a:t>Ваши данные НЕ уходят наружу:</a:t>
             </a:r>
             <a:br/>
             <a:r>
-              <a:t>• Кто вы? (юрист, закупщик, директор?)</a:t>
+              <a:t>• Не в ChatGPT (OpenAI, США)</a:t>
             </a:r>
             <a:br/>
             <a:r>
-              <a:t>• Что искать? (риски, цены, сроки?)</a:t>
+              <a:t>• Не в Яндекс GPT (Яндекс, РФ)</a:t>
             </a:r>
             <a:br/>
             <a:r>
-              <a:t>• Для чего? (для согласования, для переговоров?)</a:t>
+              <a:t>• Не в Google (Gemini, США)</a:t>
             </a:r>
             <a:br/>
             <a:r>
-              <a:t>• В каком формате? (таблица, текст, письмо?)</a:t>
+              <a:t>• Работаем в закрытом контуре компании</a:t>
+            </a:r>
+            <a:br/>
+            <a:r>
+              <a:t>• Сервер стоит внутри, данные остаются внутри</a:t>
             </a:r>
           </a:p>
           <a:p>
@@ -6487,27 +6929,27 @@
               </a:defRPr>
             </a:pPr>
             <a:r>
-              <a:t>Решение — 5 элементов:</a:t>
+              <a:t>Что можно загружать без опасений:</a:t>
             </a:r>
             <a:br/>
             <a:r>
-              <a:t>• РОЛЬ — кто вы? ('Ты — закупщик с 10-летним стажем')</a:t>
+              <a:t>• Внутренние регламенты закупок</a:t>
             </a:r>
             <a:br/>
             <a:r>
-              <a:t>• КОНТЕКСТ — ситуация ('Внутренняя закупка, бюджет до 2 млн ₽')</a:t>
+              <a:t>• Коммерческие предложения с реальными ценами</a:t>
             </a:r>
             <a:br/>
             <a:r>
-              <a:t>• ЗАДАЧА — что сделать ('Составь ТЗ на графитированные электроды')</a:t>
+              <a:t>• Договоры и приложения</a:t>
             </a:r>
             <a:br/>
             <a:r>
-              <a:t>• ФОРМАТ — как оформить ('Таблица + требования + форма заявки')</a:t>
+              <a:t>• Прайс-листы и технические задания</a:t>
             </a:r>
             <a:br/>
             <a:r>
-              <a:t>• ОГРАНИЧЕНИЯ — границы ('Без 44-ФЗ, только внутренние требования')</a:t>
+              <a:t>• Переписка с поставщиками (в том числе конфиденциальная)</a:t>
             </a:r>
           </a:p>
           <a:p>
@@ -6526,7 +6968,7 @@
               </a:defRPr>
             </a:pPr>
             <a:r>
-              <a:t>🔑 Начинайте с РОЛИ. Одно слово повышает качество на 50%.</a:t>
+              <a:t>Схема: Ваш компьютер → Внутренний сервер GENAi → Ответ (никуда больше не идёт)</a:t>
             </a:r>
           </a:p>
         </p:txBody>
@@ -6588,7 +7030,7 @@
               </a:defRPr>
             </a:pPr>
             <a:r>
-              <a:t>Плохой vs Хороший запрос</a:t>
+              <a:t>Интерфейс GENAi — 5 главных элементов</a:t>
             </a:r>
           </a:p>
         </p:txBody>
@@ -6602,17 +7044,17 @@
         <p:spPr>
           <a:xfrm>
             <a:off x="457200" y="1188720"/>
-            <a:ext cx="5486400" cy="5029200"/>
+            <a:ext cx="3474720" cy="2331720"/>
           </a:xfrm>
           <a:prstGeom prst="rect">
             <a:avLst/>
           </a:prstGeom>
           <a:solidFill>
-            <a:srgbClr val="1E0F0F"/>
+            <a:srgbClr val="14141E"/>
           </a:solidFill>
           <a:ln>
             <a:solidFill>
-              <a:srgbClr val="EF4444"/>
+              <a:srgbClr val="28283C"/>
             </a:solidFill>
           </a:ln>
         </p:spPr>
@@ -6646,8 +7088,8 @@
         </p:nvSpPr>
         <p:spPr>
           <a:xfrm>
-            <a:off x="640080" y="1371600"/>
-            <a:ext cx="5120640" cy="548640"/>
+            <a:off x="548640" y="1325880"/>
+            <a:ext cx="3291840" cy="457200"/>
           </a:xfrm>
           <a:prstGeom prst="rect">
             <a:avLst/>
@@ -6661,15 +7103,15 @@
           <a:lstStyle/>
           <a:p>
             <a:pPr>
-              <a:defRPr sz="2200" b="1">
-                <a:solidFill>
-                  <a:srgbClr val="EF4444"/>
-                </a:solidFill>
-                <a:latin typeface="Arial"/>
-              </a:defRPr>
-            </a:pPr>
-            <a:r>
-              <a:t>❌ Плохой запрос</a:t>
+              <a:defRPr sz="1800" b="1">
+                <a:solidFill>
+                  <a:srgbClr val="FFFFFF"/>
+                </a:solidFill>
+                <a:latin typeface="Arial"/>
+              </a:defRPr>
+            </a:pPr>
+            <a:r>
+              <a:t>Новый чат (+)</a:t>
             </a:r>
           </a:p>
         </p:txBody>
@@ -6682,8 +7124,8 @@
         </p:nvSpPr>
         <p:spPr>
           <a:xfrm>
-            <a:off x="640080" y="2011680"/>
-            <a:ext cx="5120640" cy="4114800"/>
+            <a:off x="548640" y="1828800"/>
+            <a:ext cx="3291840" cy="1600200"/>
           </a:xfrm>
           <a:prstGeom prst="rect">
             <a:avLst/>
@@ -6700,10 +7142,7 @@
               <a:lnSpc>
                 <a:spcPct val="120000"/>
               </a:lnSpc>
-              <a:spcBef>
-                <a:spcPts val="600"/>
-              </a:spcBef>
-              <a:defRPr sz="1500">
+              <a:defRPr sz="1400">
                 <a:solidFill>
                   <a:srgbClr val="CBD5E1"/>
                 </a:solidFill>
@@ -6711,83 +7150,7 @@
               </a:defRPr>
             </a:pPr>
             <a:r>
-              <a:t>Напиши ТЗ на ферросплавы</a:t>
-            </a:r>
-          </a:p>
-          <a:p>
-            <a:pPr>
-              <a:lnSpc>
-                <a:spcPct val="120000"/>
-              </a:lnSpc>
-              <a:spcBef>
-                <a:spcPts val="600"/>
-              </a:spcBef>
-              <a:defRPr sz="1500">
-                <a:solidFill>
-                  <a:srgbClr val="CBD5E1"/>
-                </a:solidFill>
-                <a:latin typeface="Arial"/>
-              </a:defRPr>
-            </a:pPr>
-            <a:r>
-              <a:t>→ Общий шаблон, неприменимый</a:t>
-            </a:r>
-          </a:p>
-          <a:p>
-            <a:pPr>
-              <a:lnSpc>
-                <a:spcPct val="120000"/>
-              </a:lnSpc>
-              <a:spcBef>
-                <a:spcPts val="600"/>
-              </a:spcBef>
-              <a:defRPr sz="1500">
-                <a:solidFill>
-                  <a:srgbClr val="CBD5E1"/>
-                </a:solidFill>
-                <a:latin typeface="Arial"/>
-              </a:defRPr>
-            </a:pPr>
-            <a:r>
-              <a:t>→ Без параметров, без контекста</a:t>
-            </a:r>
-          </a:p>
-          <a:p>
-            <a:pPr>
-              <a:lnSpc>
-                <a:spcPct val="120000"/>
-              </a:lnSpc>
-              <a:spcBef>
-                <a:spcPts val="600"/>
-              </a:spcBef>
-              <a:defRPr sz="1500">
-                <a:solidFill>
-                  <a:srgbClr val="CBD5E1"/>
-                </a:solidFill>
-                <a:latin typeface="Arial"/>
-              </a:defRPr>
-            </a:pPr>
-            <a:r>
-              <a:t>→ Без требований к поставщику</a:t>
-            </a:r>
-          </a:p>
-          <a:p>
-            <a:pPr>
-              <a:lnSpc>
-                <a:spcPct val="120000"/>
-              </a:lnSpc>
-              <a:spcBef>
-                <a:spcPts val="600"/>
-              </a:spcBef>
-              <a:defRPr sz="1500">
-                <a:solidFill>
-                  <a:srgbClr val="CBD5E1"/>
-                </a:solidFill>
-                <a:latin typeface="Arial"/>
-              </a:defRPr>
-            </a:pPr>
-            <a:r>
-              <a:t>Результат: непригодно к использованию</a:t>
+              <a:t>Начать новый разговор. Старые чаты сохраняются в истории слева. Можно вернуться к любому диалогу.</a:t>
             </a:r>
           </a:p>
         </p:txBody>
@@ -6800,18 +7163,18 @@
         </p:nvSpPr>
         <p:spPr>
           <a:xfrm>
-            <a:off x="6217920" y="1188720"/>
-            <a:ext cx="5486400" cy="5029200"/>
+            <a:off x="4114800" y="1188720"/>
+            <a:ext cx="3474720" cy="2331720"/>
           </a:xfrm>
           <a:prstGeom prst="rect">
             <a:avLst/>
           </a:prstGeom>
           <a:solidFill>
-            <a:srgbClr val="0F1E14"/>
+            <a:srgbClr val="14141E"/>
           </a:solidFill>
           <a:ln>
             <a:solidFill>
-              <a:srgbClr val="10B981"/>
+              <a:srgbClr val="28283C"/>
             </a:solidFill>
           </a:ln>
         </p:spPr>
@@ -6845,8 +7208,8 @@
         </p:nvSpPr>
         <p:spPr>
           <a:xfrm>
-            <a:off x="6400800" y="1371600"/>
-            <a:ext cx="5120640" cy="548640"/>
+            <a:off x="4206240" y="1325880"/>
+            <a:ext cx="3291840" cy="457200"/>
           </a:xfrm>
           <a:prstGeom prst="rect">
             <a:avLst/>
@@ -6860,15 +7223,15 @@
           <a:lstStyle/>
           <a:p>
             <a:pPr>
-              <a:defRPr sz="2200" b="1">
-                <a:solidFill>
-                  <a:srgbClr val="10B981"/>
-                </a:solidFill>
-                <a:latin typeface="Arial"/>
-              </a:defRPr>
-            </a:pPr>
-            <a:r>
-              <a:t>✅ Хороший запрос (РКЗФО)</a:t>
+              <a:defRPr sz="1800" b="1">
+                <a:solidFill>
+                  <a:srgbClr val="FFFFFF"/>
+                </a:solidFill>
+                <a:latin typeface="Arial"/>
+              </a:defRPr>
+            </a:pPr>
+            <a:r>
+              <a:t>Скрепка 📎</a:t>
             </a:r>
           </a:p>
         </p:txBody>
@@ -6881,8 +7244,8 @@
         </p:nvSpPr>
         <p:spPr>
           <a:xfrm>
-            <a:off x="6400800" y="2011680"/>
-            <a:ext cx="5120640" cy="4114800"/>
+            <a:off x="4206240" y="1828800"/>
+            <a:ext cx="3291840" cy="1600200"/>
           </a:xfrm>
           <a:prstGeom prst="rect">
             <a:avLst/>
@@ -6899,10 +7262,7 @@
               <a:lnSpc>
                 <a:spcPct val="120000"/>
               </a:lnSpc>
-              <a:spcBef>
-                <a:spcPts val="600"/>
-              </a:spcBef>
-              <a:defRPr sz="1500">
+              <a:defRPr sz="1400">
                 <a:solidFill>
                   <a:srgbClr val="CBD5E1"/>
                 </a:solidFill>
@@ -6910,18 +7270,119 @@
               </a:defRPr>
             </a:pPr>
             <a:r>
-              <a:t>Роль: металлург-технолог</a:t>
-            </a:r>
-          </a:p>
+              <a:t>Прикрепить файл: PDF (ТЗ, КП, договор), Word, Excel. AI проанализирует содержимое и ответит по документу.</a:t>
+            </a:r>
+          </a:p>
+        </p:txBody>
+      </p:sp>
+      <p:sp>
+        <p:nvSpPr>
+          <p:cNvPr id="9" name="Rectangle 8"/>
+          <p:cNvSpPr/>
+          <p:nvPr/>
+        </p:nvSpPr>
+        <p:spPr>
+          <a:xfrm>
+            <a:off x="7772400" y="1188720"/>
+            <a:ext cx="3474720" cy="2331720"/>
+          </a:xfrm>
+          <a:prstGeom prst="rect">
+            <a:avLst/>
+          </a:prstGeom>
+          <a:solidFill>
+            <a:srgbClr val="14141E"/>
+          </a:solidFill>
+          <a:ln>
+            <a:solidFill>
+              <a:srgbClr val="28283C"/>
+            </a:solidFill>
+          </a:ln>
+        </p:spPr>
+        <p:style>
+          <a:lnRef idx="1">
+            <a:schemeClr val="accent1"/>
+          </a:lnRef>
+          <a:fillRef idx="3">
+            <a:schemeClr val="accent1"/>
+          </a:fillRef>
+          <a:effectRef idx="2">
+            <a:schemeClr val="accent1"/>
+          </a:effectRef>
+          <a:fontRef idx="minor">
+            <a:schemeClr val="lt1"/>
+          </a:fontRef>
+        </p:style>
+        <p:txBody>
+          <a:bodyPr rtlCol="0" anchor="ctr"/>
+          <a:lstStyle/>
+          <a:p>
+            <a:pPr algn="ctr"/>
+          </a:p>
+        </p:txBody>
+      </p:sp>
+      <p:sp>
+        <p:nvSpPr>
+          <p:cNvPr id="10" name="TextBox 9"/>
+          <p:cNvSpPr txBox="1"/>
+          <p:nvPr/>
+        </p:nvSpPr>
+        <p:spPr>
+          <a:xfrm>
+            <a:off x="7863840" y="1325880"/>
+            <a:ext cx="3291840" cy="457200"/>
+          </a:xfrm>
+          <a:prstGeom prst="rect">
+            <a:avLst/>
+          </a:prstGeom>
+          <a:noFill/>
+        </p:spPr>
+        <p:txBody>
+          <a:bodyPr wrap="none">
+            <a:spAutoFit/>
+          </a:bodyPr>
+          <a:lstStyle/>
+          <a:p>
+            <a:pPr>
+              <a:defRPr sz="1800" b="1">
+                <a:solidFill>
+                  <a:srgbClr val="FFFFFF"/>
+                </a:solidFill>
+                <a:latin typeface="Arial"/>
+              </a:defRPr>
+            </a:pPr>
+            <a:r>
+              <a:t>Выбор модели</a:t>
+            </a:r>
+          </a:p>
+        </p:txBody>
+      </p:sp>
+      <p:sp>
+        <p:nvSpPr>
+          <p:cNvPr id="11" name="TextBox 10"/>
+          <p:cNvSpPr txBox="1"/>
+          <p:nvPr/>
+        </p:nvSpPr>
+        <p:spPr>
+          <a:xfrm>
+            <a:off x="7863840" y="1828800"/>
+            <a:ext cx="3291840" cy="1600200"/>
+          </a:xfrm>
+          <a:prstGeom prst="rect">
+            <a:avLst/>
+          </a:prstGeom>
+          <a:noFill/>
+        </p:spPr>
+        <p:txBody>
+          <a:bodyPr wrap="square">
+            <a:spAutoFit/>
+          </a:bodyPr>
+          <a:lstStyle/>
           <a:p>
             <a:pPr>
               <a:lnSpc>
                 <a:spcPct val="120000"/>
               </a:lnSpc>
-              <a:spcBef>
-                <a:spcPts val="600"/>
-              </a:spcBef>
-              <a:defRPr sz="1500">
+              <a:defRPr sz="1400">
                 <a:solidFill>
                   <a:srgbClr val="CBD5E1"/>
                 </a:solidFill>
@@ -6929,18 +7390,119 @@
               </a:defRPr>
             </a:pPr>
             <a:r>
-              <a:t>Контекст: электросталеплавильный цех</a:t>
-            </a:r>
-          </a:p>
+              <a:t>Llama 3 / Mistral — для текстов и анализа. Qwen — если работаете с китайскими поставщиками. Переключайте под задачу.</a:t>
+            </a:r>
+          </a:p>
+        </p:txBody>
+      </p:sp>
+      <p:sp>
+        <p:nvSpPr>
+          <p:cNvPr id="12" name="Rectangle 11"/>
+          <p:cNvSpPr/>
+          <p:nvPr/>
+        </p:nvSpPr>
+        <p:spPr>
+          <a:xfrm>
+            <a:off x="457200" y="3703320"/>
+            <a:ext cx="3474720" cy="2331720"/>
+          </a:xfrm>
+          <a:prstGeom prst="rect">
+            <a:avLst/>
+          </a:prstGeom>
+          <a:solidFill>
+            <a:srgbClr val="14141E"/>
+          </a:solidFill>
+          <a:ln>
+            <a:solidFill>
+              <a:srgbClr val="28283C"/>
+            </a:solidFill>
+          </a:ln>
+        </p:spPr>
+        <p:style>
+          <a:lnRef idx="1">
+            <a:schemeClr val="accent1"/>
+          </a:lnRef>
+          <a:fillRef idx="3">
+            <a:schemeClr val="accent1"/>
+          </a:fillRef>
+          <a:effectRef idx="2">
+            <a:schemeClr val="accent1"/>
+          </a:effectRef>
+          <a:fontRef idx="minor">
+            <a:schemeClr val="lt1"/>
+          </a:fontRef>
+        </p:style>
+        <p:txBody>
+          <a:bodyPr rtlCol="0" anchor="ctr"/>
+          <a:lstStyle/>
+          <a:p>
+            <a:pPr algn="ctr"/>
+          </a:p>
+        </p:txBody>
+      </p:sp>
+      <p:sp>
+        <p:nvSpPr>
+          <p:cNvPr id="13" name="TextBox 12"/>
+          <p:cNvSpPr txBox="1"/>
+          <p:nvPr/>
+        </p:nvSpPr>
+        <p:spPr>
+          <a:xfrm>
+            <a:off x="548640" y="3840480"/>
+            <a:ext cx="3291840" cy="457200"/>
+          </a:xfrm>
+          <a:prstGeom prst="rect">
+            <a:avLst/>
+          </a:prstGeom>
+          <a:noFill/>
+        </p:spPr>
+        <p:txBody>
+          <a:bodyPr wrap="none">
+            <a:spAutoFit/>
+          </a:bodyPr>
+          <a:lstStyle/>
+          <a:p>
+            <a:pPr>
+              <a:defRPr sz="1800" b="1">
+                <a:solidFill>
+                  <a:srgbClr val="FFFFFF"/>
+                </a:solidFill>
+                <a:latin typeface="Arial"/>
+              </a:defRPr>
+            </a:pPr>
+            <a:r>
+              <a:t>Настройки ⚙️</a:t>
+            </a:r>
+          </a:p>
+        </p:txBody>
+      </p:sp>
+      <p:sp>
+        <p:nvSpPr>
+          <p:cNvPr id="14" name="TextBox 13"/>
+          <p:cNvSpPr txBox="1"/>
+          <p:nvPr/>
+        </p:nvSpPr>
+        <p:spPr>
+          <a:xfrm>
+            <a:off x="548640" y="4343400"/>
+            <a:ext cx="3291840" cy="1600200"/>
+          </a:xfrm>
+          <a:prstGeom prst="rect">
+            <a:avLst/>
+          </a:prstGeom>
+          <a:noFill/>
+        </p:spPr>
+        <p:txBody>
+          <a:bodyPr wrap="square">
+            <a:spAutoFit/>
+          </a:bodyPr>
+          <a:lstStyle/>
           <a:p>
             <a:pPr>
               <a:lnSpc>
                 <a:spcPct val="120000"/>
               </a:lnSpc>
-              <a:spcBef>
-                <a:spcPts val="600"/>
-              </a:spcBef>
-              <a:defRPr sz="1500">
+              <a:defRPr sz="1400">
                 <a:solidFill>
                   <a:srgbClr val="CBD5E1"/>
                 </a:solidFill>
@@ -6948,18 +7510,119 @@
               </a:defRPr>
             </a:pPr>
             <a:r>
-              <a:t>Задача: ТЗ на ферромарганец 78% Мн</a:t>
-            </a:r>
-          </a:p>
+              <a:t>System Prompt — настройка ассистента под ваш стиль. Temperature — строгость ответов (0.1 для документов, 0.7 для идей).</a:t>
+            </a:r>
+          </a:p>
+        </p:txBody>
+      </p:sp>
+      <p:sp>
+        <p:nvSpPr>
+          <p:cNvPr id="15" name="Rectangle 14"/>
+          <p:cNvSpPr/>
+          <p:nvPr/>
+        </p:nvSpPr>
+        <p:spPr>
+          <a:xfrm>
+            <a:off x="4114800" y="3703320"/>
+            <a:ext cx="3474720" cy="2331720"/>
+          </a:xfrm>
+          <a:prstGeom prst="rect">
+            <a:avLst/>
+          </a:prstGeom>
+          <a:solidFill>
+            <a:srgbClr val="14141E"/>
+          </a:solidFill>
+          <a:ln>
+            <a:solidFill>
+              <a:srgbClr val="28283C"/>
+            </a:solidFill>
+          </a:ln>
+        </p:spPr>
+        <p:style>
+          <a:lnRef idx="1">
+            <a:schemeClr val="accent1"/>
+          </a:lnRef>
+          <a:fillRef idx="3">
+            <a:schemeClr val="accent1"/>
+          </a:fillRef>
+          <a:effectRef idx="2">
+            <a:schemeClr val="accent1"/>
+          </a:effectRef>
+          <a:fontRef idx="minor">
+            <a:schemeClr val="lt1"/>
+          </a:fontRef>
+        </p:style>
+        <p:txBody>
+          <a:bodyPr rtlCol="0" anchor="ctr"/>
+          <a:lstStyle/>
+          <a:p>
+            <a:pPr algn="ctr"/>
+          </a:p>
+        </p:txBody>
+      </p:sp>
+      <p:sp>
+        <p:nvSpPr>
+          <p:cNvPr id="16" name="TextBox 15"/>
+          <p:cNvSpPr txBox="1"/>
+          <p:nvPr/>
+        </p:nvSpPr>
+        <p:spPr>
+          <a:xfrm>
+            <a:off x="4206240" y="3840480"/>
+            <a:ext cx="3291840" cy="457200"/>
+          </a:xfrm>
+          <a:prstGeom prst="rect">
+            <a:avLst/>
+          </a:prstGeom>
+          <a:noFill/>
+        </p:spPr>
+        <p:txBody>
+          <a:bodyPr wrap="none">
+            <a:spAutoFit/>
+          </a:bodyPr>
+          <a:lstStyle/>
+          <a:p>
+            <a:pPr>
+              <a:defRPr sz="1800" b="1">
+                <a:solidFill>
+                  <a:srgbClr val="FFFFFF"/>
+                </a:solidFill>
+                <a:latin typeface="Arial"/>
+              </a:defRPr>
+            </a:pPr>
+            <a:r>
+              <a:t>Шаблоны</a:t>
+            </a:r>
+          </a:p>
+        </p:txBody>
+      </p:sp>
+      <p:sp>
+        <p:nvSpPr>
+          <p:cNvPr id="17" name="TextBox 16"/>
+          <p:cNvSpPr txBox="1"/>
+          <p:nvPr/>
+        </p:nvSpPr>
+        <p:spPr>
+          <a:xfrm>
+            <a:off x="4206240" y="4343400"/>
+            <a:ext cx="3291840" cy="1600200"/>
+          </a:xfrm>
+          <a:prstGeom prst="rect">
+            <a:avLst/>
+          </a:prstGeom>
+          <a:noFill/>
+        </p:spPr>
+        <p:txBody>
+          <a:bodyPr wrap="square">
+            <a:spAutoFit/>
+          </a:bodyPr>
+          <a:lstStyle/>
           <a:p>
             <a:pPr>
               <a:lnSpc>
                 <a:spcPct val="120000"/>
               </a:lnSpc>
-              <a:spcBef>
-                <a:spcPts val="600"/>
-              </a:spcBef>
-              <a:defRPr sz="1500">
+              <a:defRPr sz="1400">
                 <a:solidFill>
                   <a:srgbClr val="CBD5E1"/>
                 </a:solidFill>
@@ -6967,45 +7630,7 @@
               </a:defRPr>
             </a:pPr>
             <a:r>
-              <a:t>Формат: таблица с химсоставом, гранулометрией</a:t>
-            </a:r>
-          </a:p>
-          <a:p>
-            <a:pPr>
-              <a:lnSpc>
-                <a:spcPct val="120000"/>
-              </a:lnSpc>
-              <a:spcBef>
-                <a:spcPts val="600"/>
-              </a:spcBef>
-              <a:defRPr sz="1500">
-                <a:solidFill>
-                  <a:srgbClr val="CBD5E1"/>
-                </a:solidFill>
-                <a:latin typeface="Arial"/>
-              </a:defRPr>
-            </a:pPr>
-            <a:r>
-              <a:t>Ограничения: без 44-ФЗ, ГОСТ 4755</a:t>
-            </a:r>
-          </a:p>
-          <a:p>
-            <a:pPr>
-              <a:lnSpc>
-                <a:spcPct val="120000"/>
-              </a:lnSpc>
-              <a:spcBef>
-                <a:spcPts val="600"/>
-              </a:spcBef>
-              <a:defRPr sz="1500">
-                <a:solidFill>
-                  <a:srgbClr val="CBD5E1"/>
-                </a:solidFill>
-                <a:latin typeface="Arial"/>
-              </a:defRPr>
-            </a:pPr>
-            <a:r>
-              <a:t>Результат: готовое ТЗ для поставщика</a:t>
+              <a:t>Сохраняйте частые запросы. В GENAi можно создавать собственные шаблоны промптов для повторяющихся задач.</a:t>
             </a:r>
           </a:p>
         </p:txBody>
@@ -7067,7 +7692,7 @@
               </a:defRPr>
             </a:pPr>
             <a:r>
-              <a:t>Eval — ИИ проверяет сам себя</a:t>
+              <a:t>Формула РКЗФО — говорите с ИИ на одном языке</a:t>
             </a:r>
           </a:p>
         </p:txBody>
@@ -7109,19 +7734,23 @@
               </a:defRPr>
             </a:pPr>
             <a:r>
-              <a:t>Зачем нужен Eval? AI может:</a:t>
+              <a:t>Проблема: 'Проверь договор' = плохой запрос. Почему? ИИ не знает:</a:t>
             </a:r>
             <a:br/>
             <a:r>
-              <a:t>• Что-то упустить (забыть про гарантию)</a:t>
+              <a:t>• Кто вы? (юрист, закупщик, директор?)</a:t>
             </a:r>
             <a:br/>
             <a:r>
-              <a:t>• Обобщить важную деталь</a:t>
+              <a:t>• Что искать? (риски, цены, сроки?)</a:t>
             </a:r>
             <a:br/>
             <a:r>
-              <a:t>• Домыслить то, чего нет в контексте</a:t>
+              <a:t>• Для чего? (для согласования, для переговоров?)</a:t>
+            </a:r>
+            <a:br/>
+            <a:r>
+              <a:t>• В каком формате? (таблица, текст, письмо?)</a:t>
             </a:r>
           </a:p>
           <a:p>
@@ -7140,7 +7769,27 @@
               </a:defRPr>
             </a:pPr>
             <a:r>
-              <a:t>Eval = просим ИИ найти свои ошибки.</a:t>
+              <a:t>Решение — 5 элементов:</a:t>
+            </a:r>
+            <a:br/>
+            <a:r>
+              <a:t>• РОЛЬ — кто вы? ('Ты — закупщик с 10-летним стажем')</a:t>
+            </a:r>
+            <a:br/>
+            <a:r>
+              <a:t>• КОНТЕКСТ — ситуация ('Внутренняя закупка, бюджет до 2 млн ₽')</a:t>
+            </a:r>
+            <a:br/>
+            <a:r>
+              <a:t>• ЗАДАЧА — что сделать ('Составь ТЗ на графитированные электроды')</a:t>
+            </a:r>
+            <a:br/>
+            <a:r>
+              <a:t>• ФОРМАТ — как оформить ('Таблица + требования + форма заявки')</a:t>
+            </a:r>
+            <a:br/>
+            <a:r>
+              <a:t>• ОГРАНИЧЕНИЯ — границы ('Без 44-ФЗ, только внутренние требования')</a:t>
             </a:r>
           </a:p>
           <a:p>
@@ -7159,65 +7808,7 @@
               </a:defRPr>
             </a:pPr>
             <a:r>
-              <a:t>4 вопроса для Eval:</a:t>
-            </a:r>
-            <a:br/>
-            <a:r>
-              <a:t>1. 'Оцени ответ 1–10' — выявляет галлюцинации, выдуманные факты</a:t>
-            </a:r>
-            <a:br/>
-            <a:r>
-              <a:t>2. 'Что ты не учёл?' — находит слепые пятна, упущенные параметры</a:t>
-            </a:r>
-            <a:br/>
-            <a:r>
-              <a:t>3. 'Найди 3 слабых места' — ловит неточности, допущения</a:t>
-            </a:r>
-            <a:br/>
-            <a:r>
-              <a:t>4. 'Предложи другой подход' — даёт альтернативные решения</a:t>
-            </a:r>
-          </a:p>
-          <a:p>
-            <a:pPr>
-              <a:lnSpc>
-                <a:spcPct val="130000"/>
-              </a:lnSpc>
-              <a:spcBef>
-                <a:spcPts val="800"/>
-              </a:spcBef>
-              <a:defRPr sz="1700">
-                <a:solidFill>
-                  <a:srgbClr val="FFFFFF"/>
-                </a:solidFill>
-                <a:latin typeface="Arial"/>
-              </a:defRPr>
-            </a:pPr>
-            <a:r>
-              <a:t>Пример Eval для ТЗ:</a:t>
-            </a:r>
-            <a:br/>
-            <a:r>
-              <a:t>'Оцени ТЗ 1–10. Какие технические параметры упустил? Что должен указать заказчик? Какие риски для поставщика не учтены?'</a:t>
-            </a:r>
-          </a:p>
-          <a:p>
-            <a:pPr>
-              <a:lnSpc>
-                <a:spcPct val="130000"/>
-              </a:lnSpc>
-              <a:spcBef>
-                <a:spcPts val="800"/>
-              </a:spcBef>
-              <a:defRPr sz="1700">
-                <a:solidFill>
-                  <a:srgbClr val="FFFFFF"/>
-                </a:solidFill>
-                <a:latin typeface="Arial"/>
-              </a:defRPr>
-            </a:pPr>
-            <a:r>
-              <a:t>Результат: ИИ находит слабые места и предлагает улучшения.</a:t>
+              <a:t>🔑 Начинайте с РОЛИ. Одно слово повышает качество на 50%.</a:t>
             </a:r>
           </a:p>
         </p:txBody>
@@ -7279,7 +7870,7 @@
               </a:defRPr>
             </a:pPr>
             <a:r>
-              <a:t>4 фишки GENAi для закупщика</a:t>
+              <a:t>Плохой vs Хороший запрос</a:t>
             </a:r>
           </a:p>
         </p:txBody>
@@ -7293,17 +7884,17 @@
         <p:spPr>
           <a:xfrm>
             <a:off x="457200" y="1188720"/>
-            <a:ext cx="5303520" cy="2331720"/>
+            <a:ext cx="5486400" cy="5029200"/>
           </a:xfrm>
           <a:prstGeom prst="rect">
             <a:avLst/>
           </a:prstGeom>
           <a:solidFill>
-            <a:srgbClr val="14141E"/>
+            <a:srgbClr val="1E0F0F"/>
           </a:solidFill>
           <a:ln>
             <a:solidFill>
-              <a:srgbClr val="28283C"/>
+              <a:srgbClr val="EF4444"/>
             </a:solidFill>
           </a:ln>
         </p:spPr>
@@ -7337,8 +7928,8 @@
         </p:nvSpPr>
         <p:spPr>
           <a:xfrm>
-            <a:off x="548640" y="1325880"/>
-            <a:ext cx="5120640" cy="457200"/>
+            <a:off x="640080" y="1371600"/>
+            <a:ext cx="5120640" cy="548640"/>
           </a:xfrm>
           <a:prstGeom prst="rect">
             <a:avLst/>
@@ -7352,15 +7943,15 @@
           <a:lstStyle/>
           <a:p>
             <a:pPr>
-              <a:defRPr sz="1800" b="1">
-                <a:solidFill>
-                  <a:srgbClr val="FFFFFF"/>
-                </a:solidFill>
-                <a:latin typeface="Arial"/>
-              </a:defRPr>
-            </a:pPr>
-            <a:r>
-              <a:t>Фишка 1: Загрузка файлов 📎</a:t>
+              <a:defRPr sz="2200" b="1">
+                <a:solidFill>
+                  <a:srgbClr val="EF4444"/>
+                </a:solidFill>
+                <a:latin typeface="Arial"/>
+              </a:defRPr>
+            </a:pPr>
+            <a:r>
+              <a:t>❌ Плохой запрос</a:t>
             </a:r>
           </a:p>
         </p:txBody>
@@ -7373,8 +7964,8 @@
         </p:nvSpPr>
         <p:spPr>
           <a:xfrm>
-            <a:off x="548640" y="1828800"/>
-            <a:ext cx="5120640" cy="1600200"/>
+            <a:off x="640080" y="2011680"/>
+            <a:ext cx="5120640" cy="4114800"/>
           </a:xfrm>
           <a:prstGeom prst="rect">
             <a:avLst/>
@@ -7391,7 +7982,10 @@
               <a:lnSpc>
                 <a:spcPct val="120000"/>
               </a:lnSpc>
-              <a:defRPr sz="1400">
+              <a:spcBef>
+                <a:spcPts val="600"/>
+              </a:spcBef>
+              <a:defRPr sz="1500">
                 <a:solidFill>
                   <a:srgbClr val="CBD5E1"/>
                 </a:solidFill>
@@ -7399,7 +7993,83 @@
               </a:defRPr>
             </a:pPr>
             <a:r>
-              <a:t>Загружайте старые ТЗ → ИИ повторит структуру. Загружайте КП → ИИ извлечёт цены. Загружайте договоры → ИИ найдёт риски.</a:t>
+              <a:t>Напиши ТЗ на ферросплавы</a:t>
+            </a:r>
+          </a:p>
+          <a:p>
+            <a:pPr>
+              <a:lnSpc>
+                <a:spcPct val="120000"/>
+              </a:lnSpc>
+              <a:spcBef>
+                <a:spcPts val="600"/>
+              </a:spcBef>
+              <a:defRPr sz="1500">
+                <a:solidFill>
+                  <a:srgbClr val="CBD5E1"/>
+                </a:solidFill>
+                <a:latin typeface="Arial"/>
+              </a:defRPr>
+            </a:pPr>
+            <a:r>
+              <a:t>→ Общий шаблон, неприменимый</a:t>
+            </a:r>
+          </a:p>
+          <a:p>
+            <a:pPr>
+              <a:lnSpc>
+                <a:spcPct val="120000"/>
+              </a:lnSpc>
+              <a:spcBef>
+                <a:spcPts val="600"/>
+              </a:spcBef>
+              <a:defRPr sz="1500">
+                <a:solidFill>
+                  <a:srgbClr val="CBD5E1"/>
+                </a:solidFill>
+                <a:latin typeface="Arial"/>
+              </a:defRPr>
+            </a:pPr>
+            <a:r>
+              <a:t>→ Без параметров, без контекста</a:t>
+            </a:r>
+          </a:p>
+          <a:p>
+            <a:pPr>
+              <a:lnSpc>
+                <a:spcPct val="120000"/>
+              </a:lnSpc>
+              <a:spcBef>
+                <a:spcPts val="600"/>
+              </a:spcBef>
+              <a:defRPr sz="1500">
+                <a:solidFill>
+                  <a:srgbClr val="CBD5E1"/>
+                </a:solidFill>
+                <a:latin typeface="Arial"/>
+              </a:defRPr>
+            </a:pPr>
+            <a:r>
+              <a:t>→ Без требований к поставщику</a:t>
+            </a:r>
+          </a:p>
+          <a:p>
+            <a:pPr>
+              <a:lnSpc>
+                <a:spcPct val="120000"/>
+              </a:lnSpc>
+              <a:spcBef>
+                <a:spcPts val="600"/>
+              </a:spcBef>
+              <a:defRPr sz="1500">
+                <a:solidFill>
+                  <a:srgbClr val="CBD5E1"/>
+                </a:solidFill>
+                <a:latin typeface="Arial"/>
+              </a:defRPr>
+            </a:pPr>
+            <a:r>
+              <a:t>Результат: непригодно к использованию</a:t>
             </a:r>
           </a:p>
         </p:txBody>
@@ -7412,18 +8082,18 @@
         </p:nvSpPr>
         <p:spPr>
           <a:xfrm>
-            <a:off x="5943600" y="1188720"/>
-            <a:ext cx="5303520" cy="2331720"/>
+            <a:off x="6217920" y="1188720"/>
+            <a:ext cx="5486400" cy="5029200"/>
           </a:xfrm>
           <a:prstGeom prst="rect">
             <a:avLst/>
           </a:prstGeom>
           <a:solidFill>
-            <a:srgbClr val="14141E"/>
+            <a:srgbClr val="0F1E14"/>
           </a:solidFill>
           <a:ln>
             <a:solidFill>
-              <a:srgbClr val="28283C"/>
+              <a:srgbClr val="10B981"/>
             </a:solidFill>
           </a:ln>
         </p:spPr>
@@ -7457,8 +8127,8 @@
         </p:nvSpPr>
         <p:spPr>
           <a:xfrm>
-            <a:off x="6035040" y="1325880"/>
-            <a:ext cx="5120640" cy="457200"/>
+            <a:off x="6400800" y="1371600"/>
+            <a:ext cx="5120640" cy="548640"/>
           </a:xfrm>
           <a:prstGeom prst="rect">
             <a:avLst/>
@@ -7472,15 +8142,15 @@
           <a:lstStyle/>
           <a:p>
             <a:pPr>
-              <a:defRPr sz="1800" b="1">
-                <a:solidFill>
-                  <a:srgbClr val="FFFFFF"/>
-                </a:solidFill>
-                <a:latin typeface="Arial"/>
-              </a:defRPr>
-            </a:pPr>
-            <a:r>
-              <a:t>Фишка 2: System Prompt</a:t>
+              <a:defRPr sz="2200" b="1">
+                <a:solidFill>
+                  <a:srgbClr val="10B981"/>
+                </a:solidFill>
+                <a:latin typeface="Arial"/>
+              </a:defRPr>
+            </a:pPr>
+            <a:r>
+              <a:t>✅ Хороший запрос (РКЗФО)</a:t>
             </a:r>
           </a:p>
         </p:txBody>
@@ -7493,8 +8163,8 @@
         </p:nvSpPr>
         <p:spPr>
           <a:xfrm>
-            <a:off x="6035040" y="1828800"/>
-            <a:ext cx="5120640" cy="1600200"/>
+            <a:off x="6400800" y="2011680"/>
+            <a:ext cx="5120640" cy="4114800"/>
           </a:xfrm>
           <a:prstGeom prst="rect">
             <a:avLst/>
@@ -7511,7 +8181,10 @@
               <a:lnSpc>
                 <a:spcPct val="120000"/>
               </a:lnSpc>
-              <a:defRPr sz="1400">
+              <a:spcBef>
+                <a:spcPts val="600"/>
+              </a:spcBef>
+              <a:defRPr sz="1500">
                 <a:solidFill>
                   <a:srgbClr val="CBD5E1"/>
                 </a:solidFill>
@@ -7519,119 +8192,18 @@
               </a:defRPr>
             </a:pPr>
             <a:r>
-              <a:t>Настройка ассистента: 'Ты — ассистент закупщика. Всегда используй таблицы. Структура: анализ → риски → рекомендация.' Каждый чат работает по вашим правилам.</a:t>
-            </a:r>
-          </a:p>
-        </p:txBody>
-      </p:sp>
-      <p:sp>
-        <p:nvSpPr>
-          <p:cNvPr id="9" name="Rectangle 8"/>
-          <p:cNvSpPr/>
-          <p:nvPr/>
-        </p:nvSpPr>
-        <p:spPr>
-          <a:xfrm>
-            <a:off x="457200" y="3703320"/>
-            <a:ext cx="5303520" cy="2331720"/>
-          </a:xfrm>
-          <a:prstGeom prst="rect">
-            <a:avLst/>
-          </a:prstGeom>
-          <a:solidFill>
-            <a:srgbClr val="14141E"/>
-          </a:solidFill>
-          <a:ln>
-            <a:solidFill>
-              <a:srgbClr val="28283C"/>
-            </a:solidFill>
-          </a:ln>
-        </p:spPr>
-        <p:style>
-          <a:lnRef idx="1">
-            <a:schemeClr val="accent1"/>
-          </a:lnRef>
-          <a:fillRef idx="3">
-            <a:schemeClr val="accent1"/>
-          </a:fillRef>
-          <a:effectRef idx="2">
-            <a:schemeClr val="accent1"/>
-          </a:effectRef>
-          <a:fontRef idx="minor">
-            <a:schemeClr val="lt1"/>
-          </a:fontRef>
-        </p:style>
-        <p:txBody>
-          <a:bodyPr rtlCol="0" anchor="ctr"/>
-          <a:lstStyle/>
-          <a:p>
-            <a:pPr algn="ctr"/>
-          </a:p>
-        </p:txBody>
-      </p:sp>
-      <p:sp>
-        <p:nvSpPr>
-          <p:cNvPr id="10" name="TextBox 9"/>
-          <p:cNvSpPr txBox="1"/>
-          <p:nvPr/>
-        </p:nvSpPr>
-        <p:spPr>
-          <a:xfrm>
-            <a:off x="548640" y="3840480"/>
-            <a:ext cx="5120640" cy="457200"/>
-          </a:xfrm>
-          <a:prstGeom prst="rect">
-            <a:avLst/>
-          </a:prstGeom>
-          <a:noFill/>
-        </p:spPr>
-        <p:txBody>
-          <a:bodyPr wrap="none">
-            <a:spAutoFit/>
-          </a:bodyPr>
-          <a:lstStyle/>
-          <a:p>
-            <a:pPr>
-              <a:defRPr sz="1800" b="1">
-                <a:solidFill>
-                  <a:srgbClr val="FFFFFF"/>
-                </a:solidFill>
-                <a:latin typeface="Arial"/>
-              </a:defRPr>
-            </a:pPr>
-            <a:r>
-              <a:t>Фишка 3: Шаблоны</a:t>
-            </a:r>
-          </a:p>
-        </p:txBody>
-      </p:sp>
-      <p:sp>
-        <p:nvSpPr>
-          <p:cNvPr id="11" name="TextBox 10"/>
-          <p:cNvSpPr txBox="1"/>
-          <p:nvPr/>
-        </p:nvSpPr>
-        <p:spPr>
-          <a:xfrm>
-            <a:off x="548640" y="4343400"/>
-            <a:ext cx="5120640" cy="1600200"/>
-          </a:xfrm>
-          <a:prstGeom prst="rect">
-            <a:avLst/>
-          </a:prstGeom>
-          <a:noFill/>
-        </p:spPr>
-        <p:txBody>
-          <a:bodyPr wrap="square">
-            <a:spAutoFit/>
-          </a:bodyPr>
-          <a:lstStyle/>
+              <a:t>Роль: металлург-технолог</a:t>
+            </a:r>
+          </a:p>
           <a:p>
             <a:pPr>
               <a:lnSpc>
                 <a:spcPct val="120000"/>
               </a:lnSpc>
-              <a:defRPr sz="1400">
+              <a:spcBef>
+                <a:spcPts val="600"/>
+              </a:spcBef>
+              <a:defRPr sz="1500">
                 <a:solidFill>
                   <a:srgbClr val="CBD5E1"/>
                 </a:solidFill>
@@ -7639,119 +8211,18 @@
               </a:defRPr>
             </a:pPr>
             <a:r>
-              <a:t>Сохраняйте хорошие промпты как шаблоны. ТЗ_закупка → готовый промпт за 2 секунды. Экономия 5-10 минут.</a:t>
-            </a:r>
-          </a:p>
-        </p:txBody>
-      </p:sp>
-      <p:sp>
-        <p:nvSpPr>
-          <p:cNvPr id="12" name="Rectangle 11"/>
-          <p:cNvSpPr/>
-          <p:nvPr/>
-        </p:nvSpPr>
-        <p:spPr>
-          <a:xfrm>
-            <a:off x="5943600" y="3703320"/>
-            <a:ext cx="5303520" cy="2331720"/>
-          </a:xfrm>
-          <a:prstGeom prst="rect">
-            <a:avLst/>
-          </a:prstGeom>
-          <a:solidFill>
-            <a:srgbClr val="14141E"/>
-          </a:solidFill>
-          <a:ln>
-            <a:solidFill>
-              <a:srgbClr val="28283C"/>
-            </a:solidFill>
-          </a:ln>
-        </p:spPr>
-        <p:style>
-          <a:lnRef idx="1">
-            <a:schemeClr val="accent1"/>
-          </a:lnRef>
-          <a:fillRef idx="3">
-            <a:schemeClr val="accent1"/>
-          </a:fillRef>
-          <a:effectRef idx="2">
-            <a:schemeClr val="accent1"/>
-          </a:effectRef>
-          <a:fontRef idx="minor">
-            <a:schemeClr val="lt1"/>
-          </a:fontRef>
-        </p:style>
-        <p:txBody>
-          <a:bodyPr rtlCol="0" anchor="ctr"/>
-          <a:lstStyle/>
-          <a:p>
-            <a:pPr algn="ctr"/>
-          </a:p>
-        </p:txBody>
-      </p:sp>
-      <p:sp>
-        <p:nvSpPr>
-          <p:cNvPr id="13" name="TextBox 12"/>
-          <p:cNvSpPr txBox="1"/>
-          <p:nvPr/>
-        </p:nvSpPr>
-        <p:spPr>
-          <a:xfrm>
-            <a:off x="6035040" y="3840480"/>
-            <a:ext cx="5120640" cy="457200"/>
-          </a:xfrm>
-          <a:prstGeom prst="rect">
-            <a:avLst/>
-          </a:prstGeom>
-          <a:noFill/>
-        </p:spPr>
-        <p:txBody>
-          <a:bodyPr wrap="none">
-            <a:spAutoFit/>
-          </a:bodyPr>
-          <a:lstStyle/>
-          <a:p>
-            <a:pPr>
-              <a:defRPr sz="1800" b="1">
-                <a:solidFill>
-                  <a:srgbClr val="FFFFFF"/>
-                </a:solidFill>
-                <a:latin typeface="Arial"/>
-              </a:defRPr>
-            </a:pPr>
-            <a:r>
-              <a:t>Фишка 4: Knowledge Base</a:t>
-            </a:r>
-          </a:p>
-        </p:txBody>
-      </p:sp>
-      <p:sp>
-        <p:nvSpPr>
-          <p:cNvPr id="14" name="TextBox 13"/>
-          <p:cNvSpPr txBox="1"/>
-          <p:nvPr/>
-        </p:nvSpPr>
-        <p:spPr>
-          <a:xfrm>
-            <a:off x="6035040" y="4343400"/>
-            <a:ext cx="5120640" cy="1600200"/>
-          </a:xfrm>
-          <a:prstGeom prst="rect">
-            <a:avLst/>
-          </a:prstGeom>
-          <a:noFill/>
-        </p:spPr>
-        <p:txBody>
-          <a:bodyPr wrap="square">
-            <a:spAutoFit/>
-          </a:bodyPr>
-          <a:lstStyle/>
+              <a:t>Контекст: электросталеплавильный цех</a:t>
+            </a:r>
+          </a:p>
           <a:p>
             <a:pPr>
               <a:lnSpc>
                 <a:spcPct val="120000"/>
               </a:lnSpc>
-              <a:defRPr sz="1400">
+              <a:spcBef>
+                <a:spcPts val="600"/>
+              </a:spcBef>
+              <a:defRPr sz="1500">
                 <a:solidFill>
                   <a:srgbClr val="CBD5E1"/>
                 </a:solidFill>
@@ -7759,7 +8230,64 @@
               </a:defRPr>
             </a:pPr>
             <a:r>
-              <a:t>Загрузите регламенты, шаблоны ТЗ, историю закупок. ИИ будет отвечать с учётом ваших правил и примеров.</a:t>
+              <a:t>Задача: ТЗ на ферромарганец 78% Мн</a:t>
+            </a:r>
+          </a:p>
+          <a:p>
+            <a:pPr>
+              <a:lnSpc>
+                <a:spcPct val="120000"/>
+              </a:lnSpc>
+              <a:spcBef>
+                <a:spcPts val="600"/>
+              </a:spcBef>
+              <a:defRPr sz="1500">
+                <a:solidFill>
+                  <a:srgbClr val="CBD5E1"/>
+                </a:solidFill>
+                <a:latin typeface="Arial"/>
+              </a:defRPr>
+            </a:pPr>
+            <a:r>
+              <a:t>Формат: таблица с химсоставом, гранулометрией</a:t>
+            </a:r>
+          </a:p>
+          <a:p>
+            <a:pPr>
+              <a:lnSpc>
+                <a:spcPct val="120000"/>
+              </a:lnSpc>
+              <a:spcBef>
+                <a:spcPts val="600"/>
+              </a:spcBef>
+              <a:defRPr sz="1500">
+                <a:solidFill>
+                  <a:srgbClr val="CBD5E1"/>
+                </a:solidFill>
+                <a:latin typeface="Arial"/>
+              </a:defRPr>
+            </a:pPr>
+            <a:r>
+              <a:t>Ограничения: без 44-ФЗ, ГОСТ 4755</a:t>
+            </a:r>
+          </a:p>
+          <a:p>
+            <a:pPr>
+              <a:lnSpc>
+                <a:spcPct val="120000"/>
+              </a:lnSpc>
+              <a:spcBef>
+                <a:spcPts val="600"/>
+              </a:spcBef>
+              <a:defRPr sz="1500">
+                <a:solidFill>
+                  <a:srgbClr val="CBD5E1"/>
+                </a:solidFill>
+                <a:latin typeface="Arial"/>
+              </a:defRPr>
+            </a:pPr>
+            <a:r>
+              <a:t>Результат: готовое ТЗ для поставщика</a:t>
             </a:r>
           </a:p>
         </p:txBody>
